--- a/reports/presentation.pptx
+++ b/reports/presentation.pptx
@@ -3194,7 +3194,7 @@
         </p:nvSpPr>
         <p:spPr>
           <a:xfrm>
-            <a:off x="914400" y="1463040"/>
+            <a:off x="914400" y="1280160"/>
             <a:ext cx="10515600" cy="457200"/>
           </a:xfrm>
           <a:prstGeom prst="rect">
@@ -3216,7 +3216,7 @@
                 </a:solidFill>
                 <a:latin typeface="Calibri"/>
               </a:rPr>
-              <a:t>NST DVA  ·  CAPSTONE 2  ·  TRANSPORTATION &amp; PUBLIC SAFETY</a:t>
+              <a:t>NST DVA  ·  CAPSTONE 2  ·  SECTION-A  ·  TEAM G12</a:t>
             </a:r>
           </a:p>
         </p:txBody>
@@ -3229,8 +3229,8 @@
         </p:nvSpPr>
         <p:spPr>
           <a:xfrm>
-            <a:off x="914400" y="2011680"/>
-            <a:ext cx="10515600" cy="1463040"/>
+            <a:off x="914400" y="1783080"/>
+            <a:ext cx="10515600" cy="914400"/>
           </a:xfrm>
           <a:prstGeom prst="rect">
             <a:avLst/>
@@ -3247,6 +3247,41 @@
             <a:r>
               <a:rPr sz="6400" b="1" i="0">
                 <a:solidFill>
+                  <a:srgbClr val="F96167"/>
+                </a:solidFill>
+                <a:latin typeface="Calibri"/>
+              </a:rPr>
+              <a:t>DeliverIQ</a:t>
+            </a:r>
+          </a:p>
+        </p:txBody>
+      </p:sp>
+      <p:sp>
+        <p:nvSpPr>
+          <p:cNvPr id="6" name="TextBox 5"/>
+          <p:cNvSpPr txBox="1"/>
+          <p:nvPr/>
+        </p:nvSpPr>
+        <p:spPr>
+          <a:xfrm>
+            <a:off x="914400" y="2697480"/>
+            <a:ext cx="10515600" cy="640080"/>
+          </a:xfrm>
+          <a:prstGeom prst="rect">
+            <a:avLst/>
+          </a:prstGeom>
+          <a:noFill/>
+        </p:spPr>
+        <p:txBody>
+          <a:bodyPr wrap="square" lIns="0" rIns="0" tIns="0" bIns="0" anchor="t">
+            <a:spAutoFit/>
+          </a:bodyPr>
+          <a:lstStyle/>
+          <a:p>
+            <a:pPr algn="l"/>
+            <a:r>
+              <a:rPr sz="4200" b="1" i="0">
+                <a:solidFill>
                   <a:srgbClr val="FFFFFF"/>
                 </a:solidFill>
                 <a:latin typeface="Calibri"/>
@@ -3258,29 +3293,29 @@
       </p:sp>
       <p:sp>
         <p:nvSpPr>
-          <p:cNvPr id="6" name="TextBox 5"/>
-          <p:cNvSpPr txBox="1"/>
-          <p:nvPr/>
-        </p:nvSpPr>
-        <p:spPr>
-          <a:xfrm>
-            <a:off x="914400" y="3566160"/>
-            <a:ext cx="10515600" cy="640080"/>
-          </a:xfrm>
-          <a:prstGeom prst="rect">
-            <a:avLst/>
-          </a:prstGeom>
-          <a:noFill/>
-        </p:spPr>
-        <p:txBody>
-          <a:bodyPr wrap="square" lIns="0" rIns="0" tIns="0" bIns="0" anchor="t">
-            <a:spAutoFit/>
-          </a:bodyPr>
-          <a:lstStyle/>
-          <a:p>
-            <a:pPr algn="l"/>
-            <a:r>
-              <a:rPr sz="2200" b="0" i="0">
+          <p:cNvPr id="7" name="TextBox 6"/>
+          <p:cNvSpPr txBox="1"/>
+          <p:nvPr/>
+        </p:nvSpPr>
+        <p:spPr>
+          <a:xfrm>
+            <a:off x="914400" y="3611880"/>
+            <a:ext cx="10515600" cy="548640"/>
+          </a:xfrm>
+          <a:prstGeom prst="rect">
+            <a:avLst/>
+          </a:prstGeom>
+          <a:noFill/>
+        </p:spPr>
+        <p:txBody>
+          <a:bodyPr wrap="square" lIns="0" rIns="0" tIns="0" bIns="0" anchor="t">
+            <a:spAutoFit/>
+          </a:bodyPr>
+          <a:lstStyle/>
+          <a:p>
+            <a:pPr algn="l"/>
+            <a:r>
+              <a:rPr sz="1800" b="0" i="0">
                 <a:solidFill>
                   <a:srgbClr val="CADCFC"/>
                 </a:solidFill>
@@ -3293,29 +3328,29 @@
       </p:sp>
       <p:sp>
         <p:nvSpPr>
-          <p:cNvPr id="7" name="TextBox 6"/>
-          <p:cNvSpPr txBox="1"/>
-          <p:nvPr/>
-        </p:nvSpPr>
-        <p:spPr>
-          <a:xfrm>
-            <a:off x="914400" y="3977639"/>
-            <a:ext cx="10515600" cy="640080"/>
-          </a:xfrm>
-          <a:prstGeom prst="rect">
-            <a:avLst/>
-          </a:prstGeom>
-          <a:noFill/>
-        </p:spPr>
-        <p:txBody>
-          <a:bodyPr wrap="square" lIns="0" rIns="0" tIns="0" bIns="0" anchor="t">
-            <a:spAutoFit/>
-          </a:bodyPr>
-          <a:lstStyle/>
-          <a:p>
-            <a:pPr algn="l"/>
-            <a:r>
-              <a:rPr sz="2200" b="0" i="0">
+          <p:cNvPr id="8" name="TextBox 7"/>
+          <p:cNvSpPr txBox="1"/>
+          <p:nvPr/>
+        </p:nvSpPr>
+        <p:spPr>
+          <a:xfrm>
+            <a:off x="914400" y="3931920"/>
+            <a:ext cx="10515600" cy="548640"/>
+          </a:xfrm>
+          <a:prstGeom prst="rect">
+            <a:avLst/>
+          </a:prstGeom>
+          <a:noFill/>
+        </p:spPr>
+        <p:txBody>
+          <a:bodyPr wrap="square" lIns="0" rIns="0" tIns="0" bIns="0" anchor="t">
+            <a:spAutoFit/>
+          </a:bodyPr>
+          <a:lstStyle/>
+          <a:p>
+            <a:pPr algn="l"/>
+            <a:r>
+              <a:rPr sz="1800" b="0" i="0">
                 <a:solidFill>
                   <a:srgbClr val="CADCFC"/>
                 </a:solidFill>
@@ -3328,13 +3363,13 @@
       </p:sp>
       <p:sp>
         <p:nvSpPr>
-          <p:cNvPr id="8" name="TextBox 7"/>
-          <p:cNvSpPr txBox="1"/>
-          <p:nvPr/>
-        </p:nvSpPr>
-        <p:spPr>
-          <a:xfrm>
-            <a:off x="914400" y="4937760"/>
+          <p:cNvPr id="9" name="TextBox 8"/>
+          <p:cNvSpPr txBox="1"/>
+          <p:nvPr/>
+        </p:nvSpPr>
+        <p:spPr>
+          <a:xfrm>
+            <a:off x="914400" y="4754880"/>
             <a:ext cx="5486400" cy="365760"/>
           </a:xfrm>
           <a:prstGeom prst="rect">
@@ -3363,13 +3398,13 @@
       </p:sp>
       <p:sp>
         <p:nvSpPr>
-          <p:cNvPr id="9" name="Rectangle 8"/>
+          <p:cNvPr id="10" name="Rectangle 9"/>
           <p:cNvSpPr/>
           <p:nvPr/>
         </p:nvSpPr>
         <p:spPr>
           <a:xfrm>
-            <a:off x="914400" y="5532120"/>
+            <a:off x="914400" y="5349240"/>
             <a:ext cx="10332720" cy="22860"/>
           </a:xfrm>
           <a:prstGeom prst="rect">
@@ -3407,13 +3442,13 @@
       </p:sp>
       <p:sp>
         <p:nvSpPr>
-          <p:cNvPr id="10" name="TextBox 9"/>
-          <p:cNvSpPr txBox="1"/>
-          <p:nvPr/>
-        </p:nvSpPr>
-        <p:spPr>
-          <a:xfrm>
-            <a:off x="914400" y="5623560"/>
+          <p:cNvPr id="11" name="TextBox 10"/>
+          <p:cNvSpPr txBox="1"/>
+          <p:nvPr/>
+        </p:nvSpPr>
+        <p:spPr>
+          <a:xfrm>
+            <a:off x="914400" y="5440680"/>
             <a:ext cx="5303520" cy="365760"/>
           </a:xfrm>
           <a:prstGeom prst="rect">
@@ -3442,13 +3477,13 @@
       </p:sp>
       <p:sp>
         <p:nvSpPr>
-          <p:cNvPr id="11" name="TextBox 10"/>
-          <p:cNvSpPr txBox="1"/>
-          <p:nvPr/>
-        </p:nvSpPr>
-        <p:spPr>
-          <a:xfrm>
-            <a:off x="914400" y="5943600"/>
+          <p:cNvPr id="12" name="TextBox 11"/>
+          <p:cNvSpPr txBox="1"/>
+          <p:nvPr/>
+        </p:nvSpPr>
+        <p:spPr>
+          <a:xfrm>
+            <a:off x="914400" y="5760720"/>
             <a:ext cx="5303520" cy="274320"/>
           </a:xfrm>
           <a:prstGeom prst="rect">
@@ -3470,20 +3505,20 @@
                 </a:solidFill>
                 <a:latin typeface="Calibri"/>
               </a:rPr>
-              <a:t>Team: Shivam Mittal · Satyam · Members 3–7</a:t>
-            </a:r>
-          </a:p>
-        </p:txBody>
-      </p:sp>
-      <p:sp>
-        <p:nvSpPr>
-          <p:cNvPr id="12" name="TextBox 11"/>
-          <p:cNvSpPr txBox="1"/>
-          <p:nvPr/>
-        </p:nvSpPr>
-        <p:spPr>
-          <a:xfrm>
-            <a:off x="914400" y="6217920"/>
+              <a:t>Team: Shivam · Satyam · Keshav · Mohit · Prachee · Rishita</a:t>
+            </a:r>
+          </a:p>
+        </p:txBody>
+      </p:sp>
+      <p:sp>
+        <p:nvSpPr>
+          <p:cNvPr id="13" name="TextBox 12"/>
+          <p:cNvSpPr txBox="1"/>
+          <p:nvPr/>
+        </p:nvSpPr>
+        <p:spPr>
+          <a:xfrm>
+            <a:off x="914400" y="6035040"/>
             <a:ext cx="5303520" cy="274320"/>
           </a:xfrm>
           <a:prstGeom prst="rect">
@@ -3505,20 +3540,20 @@
                 </a:solidFill>
                 <a:latin typeface="Calibri"/>
               </a:rPr>
-              <a:t>Mentor: &lt;fill&gt;   ·   Section: &lt;fill&gt;   ·   Team ID: &lt;fill&gt;</a:t>
-            </a:r>
-          </a:p>
-        </p:txBody>
-      </p:sp>
-      <p:sp>
-        <p:nvSpPr>
-          <p:cNvPr id="13" name="TextBox 12"/>
-          <p:cNvSpPr txBox="1"/>
-          <p:nvPr/>
-        </p:nvSpPr>
-        <p:spPr>
-          <a:xfrm>
-            <a:off x="6858000" y="5623560"/>
+              <a:t>Mentor: &lt;fill&gt;   ·   Submission: April 29, 2026</a:t>
+            </a:r>
+          </a:p>
+        </p:txBody>
+      </p:sp>
+      <p:sp>
+        <p:nvSpPr>
+          <p:cNvPr id="14" name="TextBox 13"/>
+          <p:cNvSpPr txBox="1"/>
+          <p:nvPr/>
+        </p:nvSpPr>
+        <p:spPr>
+          <a:xfrm>
+            <a:off x="6858000" y="5440680"/>
             <a:ext cx="4389120" cy="274320"/>
           </a:xfrm>
           <a:prstGeom prst="rect">
@@ -3540,20 +3575,20 @@
                 </a:solidFill>
                 <a:latin typeface="Calibri"/>
               </a:rPr>
-              <a:t>GitHub:  github.com/&lt;team-handle&gt;</a:t>
-            </a:r>
-          </a:p>
-        </p:txBody>
-      </p:sp>
-      <p:sp>
-        <p:nvSpPr>
-          <p:cNvPr id="14" name="TextBox 13"/>
-          <p:cNvSpPr txBox="1"/>
-          <p:nvPr/>
-        </p:nvSpPr>
-        <p:spPr>
-          <a:xfrm>
-            <a:off x="6858000" y="5943600"/>
+              <a:t>GitHub:  github.com/shiavm006/Section-A_G12_DeliverIQ</a:t>
+            </a:r>
+          </a:p>
+        </p:txBody>
+      </p:sp>
+      <p:sp>
+        <p:nvSpPr>
+          <p:cNvPr id="15" name="TextBox 14"/>
+          <p:cNvSpPr txBox="1"/>
+          <p:nvPr/>
+        </p:nvSpPr>
+        <p:spPr>
+          <a:xfrm>
+            <a:off x="6858000" y="5760720"/>
             <a:ext cx="4389120" cy="274320"/>
           </a:xfrm>
           <a:prstGeom prst="rect">
@@ -3575,20 +3610,20 @@
                 </a:solidFill>
                 <a:latin typeface="Calibri"/>
               </a:rPr>
-              <a:t>Tableau:  public.tableau.com/&lt;dashboard&gt;</a:t>
-            </a:r>
-          </a:p>
-        </p:txBody>
-      </p:sp>
-      <p:sp>
-        <p:nvSpPr>
-          <p:cNvPr id="15" name="TextBox 14"/>
-          <p:cNvSpPr txBox="1"/>
-          <p:nvPr/>
-        </p:nvSpPr>
-        <p:spPr>
-          <a:xfrm>
-            <a:off x="6858000" y="6217920"/>
+              <a:t>Tableau:  public.tableau.com/.../RoadAccidentDataofUSA</a:t>
+            </a:r>
+          </a:p>
+        </p:txBody>
+      </p:sp>
+      <p:sp>
+        <p:nvSpPr>
+          <p:cNvPr id="16" name="TextBox 15"/>
+          <p:cNvSpPr txBox="1"/>
+          <p:nvPr/>
+        </p:nvSpPr>
+        <p:spPr>
+          <a:xfrm>
+            <a:off x="6858000" y="6035040"/>
             <a:ext cx="4389120" cy="274320"/>
           </a:xfrm>
           <a:prstGeom prst="rect">
@@ -3610,7 +3645,7 @@
                 </a:solidFill>
                 <a:latin typeface="Calibri"/>
               </a:rPr>
-              <a:t>Submission: April 29, 2026</a:t>
+              <a:t>Project Lead: Shivam Mittal</a:t>
             </a:r>
           </a:p>
         </p:txBody>
@@ -3900,7 +3935,7 @@
                 </a:solidFill>
                 <a:latin typeface="Calibri"/>
               </a:rPr>
-              <a:t>API coverage varies by state; 2020+ volume spike is partly an artifact.</a:t>
+              <a:t>API coverage varies by state; 2020+ volume spike is partly artefact.</a:t>
             </a:r>
           </a:p>
           <a:p>
@@ -4108,7 +4143,7 @@
                 </a:solidFill>
                 <a:latin typeface="Calibri"/>
               </a:rPr>
-              <a:t>Train a gradient-boosted classifier on incoming reports (predict True Severe at intake).</a:t>
+              <a:t>Train a gradient-boosted classifier on incoming reports (predict True Severe).</a:t>
             </a:r>
           </a:p>
           <a:p>
@@ -4237,7 +4272,7 @@
                 </a:solidFill>
                 <a:latin typeface="Calibri"/>
               </a:rPr>
-              <a:t>Severity Reality Check  ·  NST DVA Capstone 2  ·  April 2026</a:t>
+              <a:t>DeliverIQ · Severity Reality Check  ·  NST DVA Capstone 2  ·  Section-A · G12</a:t>
             </a:r>
           </a:p>
         </p:txBody>
@@ -4404,7 +4439,7 @@
                 </a:solidFill>
                 <a:latin typeface="Calibri"/>
               </a:rPr>
-              <a:t>Built by Team — every member contributed</a:t>
+              <a:t>Team G12 · Section A · DeliverIQ</a:t>
             </a:r>
           </a:p>
         </p:txBody>
@@ -4417,7 +4452,7 @@
         </p:nvSpPr>
         <p:spPr>
           <a:xfrm>
-            <a:off x="548640" y="1828800"/>
+            <a:off x="548640" y="1783080"/>
             <a:ext cx="10972800" cy="365760"/>
           </a:xfrm>
           <a:prstGeom prst="rect">
@@ -4452,8 +4487,8 @@
         </p:nvSpPr>
         <p:spPr>
           <a:xfrm>
-            <a:off x="548640" y="2240280"/>
-            <a:ext cx="2697480" cy="868680"/>
+            <a:off x="548640" y="2194560"/>
+            <a:ext cx="3657600" cy="914400"/>
           </a:xfrm>
           <a:prstGeom prst="rect">
             <a:avLst/>
@@ -4498,8 +4533,8 @@
         </p:nvSpPr>
         <p:spPr>
           <a:xfrm>
-            <a:off x="685800" y="2331720"/>
-            <a:ext cx="2468880" cy="320040"/>
+            <a:off x="685800" y="2286000"/>
+            <a:ext cx="3383280" cy="320040"/>
           </a:xfrm>
           <a:prstGeom prst="rect">
             <a:avLst/>
@@ -4533,23 +4568,23 @@
         </p:nvSpPr>
         <p:spPr>
           <a:xfrm>
-            <a:off x="685800" y="2651760"/>
-            <a:ext cx="2468880" cy="411480"/>
-          </a:xfrm>
-          <a:prstGeom prst="rect">
-            <a:avLst/>
-          </a:prstGeom>
-          <a:noFill/>
-        </p:spPr>
-        <p:txBody>
-          <a:bodyPr wrap="square" lIns="0" rIns="0" tIns="0" bIns="0" anchor="t">
-            <a:spAutoFit/>
-          </a:bodyPr>
-          <a:lstStyle/>
-          <a:p>
-            <a:pPr algn="l"/>
-            <a:r>
-              <a:rPr sz="1400" b="1" i="0">
+            <a:off x="685800" y="2606040"/>
+            <a:ext cx="3383280" cy="457200"/>
+          </a:xfrm>
+          <a:prstGeom prst="rect">
+            <a:avLst/>
+          </a:prstGeom>
+          <a:noFill/>
+        </p:spPr>
+        <p:txBody>
+          <a:bodyPr wrap="square" lIns="0" rIns="0" tIns="0" bIns="0" anchor="t">
+            <a:spAutoFit/>
+          </a:bodyPr>
+          <a:lstStyle/>
+          <a:p>
+            <a:pPr algn="l"/>
+            <a:r>
+              <a:rPr sz="1500" b="1" i="0">
                 <a:solidFill>
                   <a:srgbClr val="1E2761"/>
                 </a:solidFill>
@@ -4568,8 +4603,8 @@
         </p:nvSpPr>
         <p:spPr>
           <a:xfrm>
-            <a:off x="3383280" y="2240280"/>
-            <a:ext cx="2697480" cy="868680"/>
+            <a:off x="4343400" y="2194560"/>
+            <a:ext cx="3657600" cy="914400"/>
           </a:xfrm>
           <a:prstGeom prst="rect">
             <a:avLst/>
@@ -4614,8 +4649,8 @@
         </p:nvSpPr>
         <p:spPr>
           <a:xfrm>
-            <a:off x="3520440" y="2331720"/>
-            <a:ext cx="2468880" cy="320040"/>
+            <a:off x="4480560" y="2286000"/>
+            <a:ext cx="3383280" cy="320040"/>
           </a:xfrm>
           <a:prstGeom prst="rect">
             <a:avLst/>
@@ -4649,29 +4684,29 @@
         </p:nvSpPr>
         <p:spPr>
           <a:xfrm>
-            <a:off x="3520440" y="2651760"/>
-            <a:ext cx="2468880" cy="411480"/>
-          </a:xfrm>
-          <a:prstGeom prst="rect">
-            <a:avLst/>
-          </a:prstGeom>
-          <a:noFill/>
-        </p:spPr>
-        <p:txBody>
-          <a:bodyPr wrap="square" lIns="0" rIns="0" tIns="0" bIns="0" anchor="t">
-            <a:spAutoFit/>
-          </a:bodyPr>
-          <a:lstStyle/>
-          <a:p>
-            <a:pPr algn="l"/>
-            <a:r>
-              <a:rPr sz="1400" b="1" i="0">
+            <a:off x="4480560" y="2606040"/>
+            <a:ext cx="3383280" cy="457200"/>
+          </a:xfrm>
+          <a:prstGeom prst="rect">
+            <a:avLst/>
+          </a:prstGeom>
+          <a:noFill/>
+        </p:spPr>
+        <p:txBody>
+          <a:bodyPr wrap="square" lIns="0" rIns="0" tIns="0" bIns="0" anchor="t">
+            <a:spAutoFit/>
+          </a:bodyPr>
+          <a:lstStyle/>
+          <a:p>
+            <a:pPr algn="l"/>
+            <a:r>
+              <a:rPr sz="1500" b="1" i="0">
                 <a:solidFill>
                   <a:srgbClr val="1E2761"/>
                 </a:solidFill>
                 <a:latin typeface="Calibri"/>
               </a:rPr>
-              <a:t>Satyam</a:t>
+              <a:t>Satyam Kumar</a:t>
             </a:r>
           </a:p>
         </p:txBody>
@@ -4684,8 +4719,8 @@
         </p:nvSpPr>
         <p:spPr>
           <a:xfrm>
-            <a:off x="6217920" y="2240280"/>
-            <a:ext cx="2697480" cy="868680"/>
+            <a:off x="8138160" y="2194560"/>
+            <a:ext cx="3657600" cy="914400"/>
           </a:xfrm>
           <a:prstGeom prst="rect">
             <a:avLst/>
@@ -4730,8 +4765,8 @@
         </p:nvSpPr>
         <p:spPr>
           <a:xfrm>
-            <a:off x="6355080" y="2331720"/>
-            <a:ext cx="2468880" cy="320040"/>
+            <a:off x="8275320" y="2286000"/>
+            <a:ext cx="3383280" cy="320040"/>
           </a:xfrm>
           <a:prstGeom prst="rect">
             <a:avLst/>
@@ -4765,29 +4800,29 @@
         </p:nvSpPr>
         <p:spPr>
           <a:xfrm>
-            <a:off x="6355080" y="2651760"/>
-            <a:ext cx="2468880" cy="411480"/>
-          </a:xfrm>
-          <a:prstGeom prst="rect">
-            <a:avLst/>
-          </a:prstGeom>
-          <a:noFill/>
-        </p:spPr>
-        <p:txBody>
-          <a:bodyPr wrap="square" lIns="0" rIns="0" tIns="0" bIns="0" anchor="t">
-            <a:spAutoFit/>
-          </a:bodyPr>
-          <a:lstStyle/>
-          <a:p>
-            <a:pPr algn="l"/>
-            <a:r>
-              <a:rPr sz="1400" b="1" i="0">
+            <a:off x="8275320" y="2606040"/>
+            <a:ext cx="3383280" cy="457200"/>
+          </a:xfrm>
+          <a:prstGeom prst="rect">
+            <a:avLst/>
+          </a:prstGeom>
+          <a:noFill/>
+        </p:spPr>
+        <p:txBody>
+          <a:bodyPr wrap="square" lIns="0" rIns="0" tIns="0" bIns="0" anchor="t">
+            <a:spAutoFit/>
+          </a:bodyPr>
+          <a:lstStyle/>
+          <a:p>
+            <a:pPr algn="l"/>
+            <a:r>
+              <a:rPr sz="1500" b="1" i="0">
                 <a:solidFill>
                   <a:srgbClr val="1E2761"/>
                 </a:solidFill>
                 <a:latin typeface="Calibri"/>
               </a:rPr>
-              <a:t>&lt;Member 3&gt;</a:t>
+              <a:t>Keshav</a:t>
             </a:r>
           </a:p>
         </p:txBody>
@@ -4800,8 +4835,8 @@
         </p:nvSpPr>
         <p:spPr>
           <a:xfrm>
-            <a:off x="9052560" y="2240280"/>
-            <a:ext cx="2697480" cy="868680"/>
+            <a:off x="548640" y="3246120"/>
+            <a:ext cx="3657600" cy="914400"/>
           </a:xfrm>
           <a:prstGeom prst="rect">
             <a:avLst/>
@@ -4846,8 +4881,8 @@
         </p:nvSpPr>
         <p:spPr>
           <a:xfrm>
-            <a:off x="9189720" y="2331720"/>
-            <a:ext cx="2468880" cy="320040"/>
+            <a:off x="685800" y="3337560"/>
+            <a:ext cx="3383280" cy="320040"/>
           </a:xfrm>
           <a:prstGeom prst="rect">
             <a:avLst/>
@@ -4881,29 +4916,29 @@
         </p:nvSpPr>
         <p:spPr>
           <a:xfrm>
-            <a:off x="9189720" y="2651760"/>
-            <a:ext cx="2468880" cy="411480"/>
-          </a:xfrm>
-          <a:prstGeom prst="rect">
-            <a:avLst/>
-          </a:prstGeom>
-          <a:noFill/>
-        </p:spPr>
-        <p:txBody>
-          <a:bodyPr wrap="square" lIns="0" rIns="0" tIns="0" bIns="0" anchor="t">
-            <a:spAutoFit/>
-          </a:bodyPr>
-          <a:lstStyle/>
-          <a:p>
-            <a:pPr algn="l"/>
-            <a:r>
-              <a:rPr sz="1400" b="1" i="0">
+            <a:off x="685800" y="3657600"/>
+            <a:ext cx="3383280" cy="457200"/>
+          </a:xfrm>
+          <a:prstGeom prst="rect">
+            <a:avLst/>
+          </a:prstGeom>
+          <a:noFill/>
+        </p:spPr>
+        <p:txBody>
+          <a:bodyPr wrap="square" lIns="0" rIns="0" tIns="0" bIns="0" anchor="t">
+            <a:spAutoFit/>
+          </a:bodyPr>
+          <a:lstStyle/>
+          <a:p>
+            <a:pPr algn="l"/>
+            <a:r>
+              <a:rPr sz="1500" b="1" i="0">
                 <a:solidFill>
                   <a:srgbClr val="1E2761"/>
                 </a:solidFill>
                 <a:latin typeface="Calibri"/>
               </a:rPr>
-              <a:t>&lt;Member 4&gt;</a:t>
+              <a:t>Mohit Singh</a:t>
             </a:r>
           </a:p>
         </p:txBody>
@@ -4916,8 +4951,8 @@
         </p:nvSpPr>
         <p:spPr>
           <a:xfrm>
-            <a:off x="548640" y="3200400"/>
-            <a:ext cx="2697480" cy="868680"/>
+            <a:off x="4343400" y="3246120"/>
+            <a:ext cx="3657600" cy="914400"/>
           </a:xfrm>
           <a:prstGeom prst="rect">
             <a:avLst/>
@@ -4962,8 +4997,8 @@
         </p:nvSpPr>
         <p:spPr>
           <a:xfrm>
-            <a:off x="685800" y="3291840"/>
-            <a:ext cx="2468880" cy="320040"/>
+            <a:off x="4480560" y="3337560"/>
+            <a:ext cx="3383280" cy="320040"/>
           </a:xfrm>
           <a:prstGeom prst="rect">
             <a:avLst/>
@@ -4997,29 +5032,29 @@
         </p:nvSpPr>
         <p:spPr>
           <a:xfrm>
-            <a:off x="685800" y="3611880"/>
-            <a:ext cx="2468880" cy="411480"/>
-          </a:xfrm>
-          <a:prstGeom prst="rect">
-            <a:avLst/>
-          </a:prstGeom>
-          <a:noFill/>
-        </p:spPr>
-        <p:txBody>
-          <a:bodyPr wrap="square" lIns="0" rIns="0" tIns="0" bIns="0" anchor="t">
-            <a:spAutoFit/>
-          </a:bodyPr>
-          <a:lstStyle/>
-          <a:p>
-            <a:pPr algn="l"/>
-            <a:r>
-              <a:rPr sz="1400" b="1" i="0">
+            <a:off x="4480560" y="3657600"/>
+            <a:ext cx="3383280" cy="457200"/>
+          </a:xfrm>
+          <a:prstGeom prst="rect">
+            <a:avLst/>
+          </a:prstGeom>
+          <a:noFill/>
+        </p:spPr>
+        <p:txBody>
+          <a:bodyPr wrap="square" lIns="0" rIns="0" tIns="0" bIns="0" anchor="t">
+            <a:spAutoFit/>
+          </a:bodyPr>
+          <a:lstStyle/>
+          <a:p>
+            <a:pPr algn="l"/>
+            <a:r>
+              <a:rPr sz="1500" b="1" i="0">
                 <a:solidFill>
                   <a:srgbClr val="1E2761"/>
                 </a:solidFill>
                 <a:latin typeface="Calibri"/>
               </a:rPr>
-              <a:t>&lt;Member 5&gt;</a:t>
+              <a:t>Prachee Dhar</a:t>
             </a:r>
           </a:p>
         </p:txBody>
@@ -5032,8 +5067,8 @@
         </p:nvSpPr>
         <p:spPr>
           <a:xfrm>
-            <a:off x="3383280" y="3200400"/>
-            <a:ext cx="2697480" cy="868680"/>
+            <a:off x="8138160" y="3246120"/>
+            <a:ext cx="3657600" cy="914400"/>
           </a:xfrm>
           <a:prstGeom prst="rect">
             <a:avLst/>
@@ -5078,8 +5113,8 @@
         </p:nvSpPr>
         <p:spPr>
           <a:xfrm>
-            <a:off x="3520440" y="3291840"/>
-            <a:ext cx="2468880" cy="320040"/>
+            <a:off x="8275320" y="3337560"/>
+            <a:ext cx="3383280" cy="320040"/>
           </a:xfrm>
           <a:prstGeom prst="rect">
             <a:avLst/>
@@ -5100,7 +5135,7 @@
                 </a:solidFill>
                 <a:latin typeface="Calibri"/>
               </a:rPr>
-              <a:t>Strategy Lead</a:t>
+              <a:t>Strategy + PPT Lead</a:t>
             </a:r>
           </a:p>
         </p:txBody>
@@ -5113,193 +5148,77 @@
         </p:nvSpPr>
         <p:spPr>
           <a:xfrm>
-            <a:off x="3520440" y="3611880"/>
-            <a:ext cx="2468880" cy="411480"/>
-          </a:xfrm>
-          <a:prstGeom prst="rect">
-            <a:avLst/>
-          </a:prstGeom>
-          <a:noFill/>
-        </p:spPr>
-        <p:txBody>
-          <a:bodyPr wrap="square" lIns="0" rIns="0" tIns="0" bIns="0" anchor="t">
-            <a:spAutoFit/>
-          </a:bodyPr>
-          <a:lstStyle/>
-          <a:p>
-            <a:pPr algn="l"/>
-            <a:r>
-              <a:rPr sz="1400" b="1" i="0">
+            <a:off x="8275320" y="3657600"/>
+            <a:ext cx="3383280" cy="457200"/>
+          </a:xfrm>
+          <a:prstGeom prst="rect">
+            <a:avLst/>
+          </a:prstGeom>
+          <a:noFill/>
+        </p:spPr>
+        <p:txBody>
+          <a:bodyPr wrap="square" lIns="0" rIns="0" tIns="0" bIns="0" anchor="t">
+            <a:spAutoFit/>
+          </a:bodyPr>
+          <a:lstStyle/>
+          <a:p>
+            <a:pPr algn="l"/>
+            <a:r>
+              <a:rPr sz="1500" b="1" i="0">
                 <a:solidFill>
                   <a:srgbClr val="1E2761"/>
                 </a:solidFill>
                 <a:latin typeface="Calibri"/>
               </a:rPr>
-              <a:t>&lt;Member 6&gt;</a:t>
-            </a:r>
-          </a:p>
-        </p:txBody>
-      </p:sp>
-      <p:sp>
-        <p:nvSpPr>
-          <p:cNvPr id="24" name="Rectangle 23"/>
+              <a:t>Rishita Boisnobi</a:t>
+            </a:r>
+          </a:p>
+        </p:txBody>
+      </p:sp>
+      <p:sp>
+        <p:nvSpPr>
+          <p:cNvPr id="24" name="TextBox 23"/>
+          <p:cNvSpPr txBox="1"/>
+          <p:nvPr/>
+        </p:nvSpPr>
+        <p:spPr>
+          <a:xfrm>
+            <a:off x="548640" y="4434840"/>
+            <a:ext cx="10972800" cy="365760"/>
+          </a:xfrm>
+          <a:prstGeom prst="rect">
+            <a:avLst/>
+          </a:prstGeom>
+          <a:noFill/>
+        </p:spPr>
+        <p:txBody>
+          <a:bodyPr wrap="square" lIns="0" rIns="0" tIns="0" bIns="0" anchor="t">
+            <a:spAutoFit/>
+          </a:bodyPr>
+          <a:lstStyle/>
+          <a:p>
+            <a:pPr algn="l"/>
+            <a:r>
+              <a:rPr sz="1100" b="1" i="0">
+                <a:solidFill>
+                  <a:srgbClr val="64748B"/>
+                </a:solidFill>
+                <a:latin typeface="Calibri"/>
+              </a:rPr>
+              <a:t>ARTEFACTS  ·  GitHub  +  Tableau  +  Reports</a:t>
+            </a:r>
+          </a:p>
+        </p:txBody>
+      </p:sp>
+      <p:sp>
+        <p:nvSpPr>
+          <p:cNvPr id="25" name="Rectangle 24"/>
           <p:cNvSpPr/>
           <p:nvPr/>
         </p:nvSpPr>
         <p:spPr>
           <a:xfrm>
-            <a:off x="6217920" y="3200400"/>
-            <a:ext cx="2697480" cy="868680"/>
-          </a:xfrm>
-          <a:prstGeom prst="rect">
-            <a:avLst/>
-          </a:prstGeom>
-          <a:solidFill>
-            <a:srgbClr val="F1F5F9"/>
-          </a:solidFill>
-          <a:ln w="6350">
-            <a:solidFill>
-              <a:srgbClr val="CADCFC"/>
-            </a:solidFill>
-          </a:ln>
-          <a:effectLst/>
-        </p:spPr>
-        <p:style>
-          <a:lnRef idx="1">
-            <a:schemeClr val="accent1"/>
-          </a:lnRef>
-          <a:fillRef idx="3">
-            <a:schemeClr val="accent1"/>
-          </a:fillRef>
-          <a:effectRef idx="2">
-            <a:schemeClr val="accent1"/>
-          </a:effectRef>
-          <a:fontRef idx="minor">
-            <a:schemeClr val="lt1"/>
-          </a:fontRef>
-        </p:style>
-        <p:txBody>
-          <a:bodyPr rtlCol="0" anchor="ctr"/>
-          <a:lstStyle/>
-          <a:p>
-            <a:pPr algn="ctr"/>
-          </a:p>
-        </p:txBody>
-      </p:sp>
-      <p:sp>
-        <p:nvSpPr>
-          <p:cNvPr id="25" name="TextBox 24"/>
-          <p:cNvSpPr txBox="1"/>
-          <p:nvPr/>
-        </p:nvSpPr>
-        <p:spPr>
-          <a:xfrm>
-            <a:off x="6355080" y="3291840"/>
-            <a:ext cx="2468880" cy="320040"/>
-          </a:xfrm>
-          <a:prstGeom prst="rect">
-            <a:avLst/>
-          </a:prstGeom>
-          <a:noFill/>
-        </p:spPr>
-        <p:txBody>
-          <a:bodyPr wrap="square" lIns="0" rIns="0" tIns="0" bIns="0" anchor="t">
-            <a:spAutoFit/>
-          </a:bodyPr>
-          <a:lstStyle/>
-          <a:p>
-            <a:pPr algn="l"/>
-            <a:r>
-              <a:rPr sz="1000" b="1" i="0">
-                <a:solidFill>
-                  <a:srgbClr val="64748B"/>
-                </a:solidFill>
-                <a:latin typeface="Calibri"/>
-              </a:rPr>
-              <a:t>PPT &amp; Quality Lead</a:t>
-            </a:r>
-          </a:p>
-        </p:txBody>
-      </p:sp>
-      <p:sp>
-        <p:nvSpPr>
-          <p:cNvPr id="26" name="TextBox 25"/>
-          <p:cNvSpPr txBox="1"/>
-          <p:nvPr/>
-        </p:nvSpPr>
-        <p:spPr>
-          <a:xfrm>
-            <a:off x="6355080" y="3611880"/>
-            <a:ext cx="2468880" cy="411480"/>
-          </a:xfrm>
-          <a:prstGeom prst="rect">
-            <a:avLst/>
-          </a:prstGeom>
-          <a:noFill/>
-        </p:spPr>
-        <p:txBody>
-          <a:bodyPr wrap="square" lIns="0" rIns="0" tIns="0" bIns="0" anchor="t">
-            <a:spAutoFit/>
-          </a:bodyPr>
-          <a:lstStyle/>
-          <a:p>
-            <a:pPr algn="l"/>
-            <a:r>
-              <a:rPr sz="1400" b="1" i="0">
-                <a:solidFill>
-                  <a:srgbClr val="1E2761"/>
-                </a:solidFill>
-                <a:latin typeface="Calibri"/>
-              </a:rPr>
-              <a:t>&lt;Member 7&gt;</a:t>
-            </a:r>
-          </a:p>
-        </p:txBody>
-      </p:sp>
-      <p:sp>
-        <p:nvSpPr>
-          <p:cNvPr id="27" name="TextBox 26"/>
-          <p:cNvSpPr txBox="1"/>
-          <p:nvPr/>
-        </p:nvSpPr>
-        <p:spPr>
-          <a:xfrm>
-            <a:off x="548640" y="4297680"/>
-            <a:ext cx="10972800" cy="365760"/>
-          </a:xfrm>
-          <a:prstGeom prst="rect">
-            <a:avLst/>
-          </a:prstGeom>
-          <a:noFill/>
-        </p:spPr>
-        <p:txBody>
-          <a:bodyPr wrap="square" lIns="0" rIns="0" tIns="0" bIns="0" anchor="t">
-            <a:spAutoFit/>
-          </a:bodyPr>
-          <a:lstStyle/>
-          <a:p>
-            <a:pPr algn="l"/>
-            <a:r>
-              <a:rPr sz="1100" b="1" i="0">
-                <a:solidFill>
-                  <a:srgbClr val="64748B"/>
-                </a:solidFill>
-                <a:latin typeface="Calibri"/>
-              </a:rPr>
-              <a:t>ARTEFACTS  ·  github + tableau</a:t>
-            </a:r>
-          </a:p>
-        </p:txBody>
-      </p:sp>
-      <p:sp>
-        <p:nvSpPr>
-          <p:cNvPr id="28" name="Rectangle 27"/>
-          <p:cNvSpPr/>
-          <p:nvPr/>
-        </p:nvSpPr>
-        <p:spPr>
-          <a:xfrm>
-            <a:off x="548640" y="4709160"/>
+            <a:off x="548640" y="4846320"/>
             <a:ext cx="11064240" cy="1554480"/>
           </a:xfrm>
           <a:prstGeom prst="rect">
@@ -5339,13 +5258,153 @@
       </p:sp>
       <p:sp>
         <p:nvSpPr>
+          <p:cNvPr id="26" name="TextBox 25"/>
+          <p:cNvSpPr txBox="1"/>
+          <p:nvPr/>
+        </p:nvSpPr>
+        <p:spPr>
+          <a:xfrm>
+            <a:off x="777240" y="4983480"/>
+            <a:ext cx="10515600" cy="365760"/>
+          </a:xfrm>
+          <a:prstGeom prst="rect">
+            <a:avLst/>
+          </a:prstGeom>
+          <a:noFill/>
+        </p:spPr>
+        <p:txBody>
+          <a:bodyPr wrap="square" lIns="0" rIns="0" tIns="0" bIns="0" anchor="t">
+            <a:spAutoFit/>
+          </a:bodyPr>
+          <a:lstStyle/>
+          <a:p>
+            <a:pPr algn="l"/>
+            <a:r>
+              <a:rPr sz="1100" b="1" i="0">
+                <a:solidFill>
+                  <a:srgbClr val="CADCFC"/>
+                </a:solidFill>
+                <a:latin typeface="Calibri"/>
+              </a:rPr>
+              <a:t>▸  GitHub Repo:</a:t>
+            </a:r>
+          </a:p>
+        </p:txBody>
+      </p:sp>
+      <p:sp>
+        <p:nvSpPr>
+          <p:cNvPr id="27" name="TextBox 26"/>
+          <p:cNvSpPr txBox="1"/>
+          <p:nvPr/>
+        </p:nvSpPr>
+        <p:spPr>
+          <a:xfrm>
+            <a:off x="2606040" y="4983480"/>
+            <a:ext cx="8686800" cy="365760"/>
+          </a:xfrm>
+          <a:prstGeom prst="rect">
+            <a:avLst/>
+          </a:prstGeom>
+          <a:noFill/>
+        </p:spPr>
+        <p:txBody>
+          <a:bodyPr wrap="square" lIns="0" rIns="0" tIns="0" bIns="0" anchor="t">
+            <a:spAutoFit/>
+          </a:bodyPr>
+          <a:lstStyle/>
+          <a:p>
+            <a:pPr algn="l"/>
+            <a:r>
+              <a:rPr sz="1100" b="0" i="0">
+                <a:solidFill>
+                  <a:srgbClr val="FFFFFF"/>
+                </a:solidFill>
+                <a:latin typeface="Calibri"/>
+              </a:rPr>
+              <a:t>github.com/shiavm006/Section-A_G12_DeliverIQ</a:t>
+            </a:r>
+          </a:p>
+        </p:txBody>
+      </p:sp>
+      <p:sp>
+        <p:nvSpPr>
+          <p:cNvPr id="28" name="TextBox 27"/>
+          <p:cNvSpPr txBox="1"/>
+          <p:nvPr/>
+        </p:nvSpPr>
+        <p:spPr>
+          <a:xfrm>
+            <a:off x="777240" y="5285232"/>
+            <a:ext cx="10515600" cy="365760"/>
+          </a:xfrm>
+          <a:prstGeom prst="rect">
+            <a:avLst/>
+          </a:prstGeom>
+          <a:noFill/>
+        </p:spPr>
+        <p:txBody>
+          <a:bodyPr wrap="square" lIns="0" rIns="0" tIns="0" bIns="0" anchor="t">
+            <a:spAutoFit/>
+          </a:bodyPr>
+          <a:lstStyle/>
+          <a:p>
+            <a:pPr algn="l"/>
+            <a:r>
+              <a:rPr sz="1100" b="1" i="0">
+                <a:solidFill>
+                  <a:srgbClr val="CADCFC"/>
+                </a:solidFill>
+                <a:latin typeface="Calibri"/>
+              </a:rPr>
+              <a:t>▸  Tableau Public:</a:t>
+            </a:r>
+          </a:p>
+        </p:txBody>
+      </p:sp>
+      <p:sp>
+        <p:nvSpPr>
           <p:cNvPr id="29" name="TextBox 28"/>
           <p:cNvSpPr txBox="1"/>
           <p:nvPr/>
         </p:nvSpPr>
         <p:spPr>
           <a:xfrm>
-            <a:off x="777240" y="4846320"/>
+            <a:off x="2606040" y="5285232"/>
+            <a:ext cx="8686800" cy="365760"/>
+          </a:xfrm>
+          <a:prstGeom prst="rect">
+            <a:avLst/>
+          </a:prstGeom>
+          <a:noFill/>
+        </p:spPr>
+        <p:txBody>
+          <a:bodyPr wrap="square" lIns="0" rIns="0" tIns="0" bIns="0" anchor="t">
+            <a:spAutoFit/>
+          </a:bodyPr>
+          <a:lstStyle/>
+          <a:p>
+            <a:pPr algn="l"/>
+            <a:r>
+              <a:rPr sz="1000" b="0" i="0">
+                <a:solidFill>
+                  <a:srgbClr val="FFFFFF"/>
+                </a:solidFill>
+                <a:latin typeface="Calibri"/>
+              </a:rPr>
+              <a:t>public.tableau.com/views/RoadAccidentDataofUSA_17773613139680/Dashboard1</a:t>
+            </a:r>
+          </a:p>
+        </p:txBody>
+      </p:sp>
+      <p:sp>
+        <p:nvSpPr>
+          <p:cNvPr id="30" name="TextBox 29"/>
+          <p:cNvSpPr txBox="1"/>
+          <p:nvPr/>
+        </p:nvSpPr>
+        <p:spPr>
+          <a:xfrm>
+            <a:off x="777240" y="5605272"/>
             <a:ext cx="10515600" cy="365760"/>
           </a:xfrm>
           <a:prstGeom prst="rect">
@@ -5367,20 +5426,20 @@
                 </a:solidFill>
                 <a:latin typeface="Calibri"/>
               </a:rPr>
-              <a:t>▸  GitHub Repo:</a:t>
-            </a:r>
-          </a:p>
-        </p:txBody>
-      </p:sp>
-      <p:sp>
-        <p:nvSpPr>
-          <p:cNvPr id="30" name="TextBox 29"/>
-          <p:cNvSpPr txBox="1"/>
-          <p:nvPr/>
-        </p:nvSpPr>
-        <p:spPr>
-          <a:xfrm>
-            <a:off x="2606040" y="4846320"/>
+              <a:t>▸  Project Report:</a:t>
+            </a:r>
+          </a:p>
+        </p:txBody>
+      </p:sp>
+      <p:sp>
+        <p:nvSpPr>
+          <p:cNvPr id="31" name="TextBox 30"/>
+          <p:cNvSpPr txBox="1"/>
+          <p:nvPr/>
+        </p:nvSpPr>
+        <p:spPr>
+          <a:xfrm>
+            <a:off x="2606040" y="5605272"/>
             <a:ext cx="8686800" cy="365760"/>
           </a:xfrm>
           <a:prstGeom prst="rect">
@@ -5402,20 +5461,20 @@
                 </a:solidFill>
                 <a:latin typeface="Calibri"/>
               </a:rPr>
-              <a:t>github.com/&lt;team-handle&gt;  (5 notebooks · ETL pipeline · 3 dashboards · report + deck)</a:t>
-            </a:r>
-          </a:p>
-        </p:txBody>
-      </p:sp>
-      <p:sp>
-        <p:nvSpPr>
-          <p:cNvPr id="31" name="TextBox 30"/>
-          <p:cNvSpPr txBox="1"/>
-          <p:nvPr/>
-        </p:nvSpPr>
-        <p:spPr>
-          <a:xfrm>
-            <a:off x="777240" y="5166360"/>
+              <a:t>reports/project_report.pdf  (18 sections, ~22 pages)</a:t>
+            </a:r>
+          </a:p>
+        </p:txBody>
+      </p:sp>
+      <p:sp>
+        <p:nvSpPr>
+          <p:cNvPr id="32" name="TextBox 31"/>
+          <p:cNvSpPr txBox="1"/>
+          <p:nvPr/>
+        </p:nvSpPr>
+        <p:spPr>
+          <a:xfrm>
+            <a:off x="777240" y="5925312"/>
             <a:ext cx="10515600" cy="365760"/>
           </a:xfrm>
           <a:prstGeom prst="rect">
@@ -5437,20 +5496,20 @@
                 </a:solidFill>
                 <a:latin typeface="Calibri"/>
               </a:rPr>
-              <a:t>▸  Tableau Public:</a:t>
-            </a:r>
-          </a:p>
-        </p:txBody>
-      </p:sp>
-      <p:sp>
-        <p:nvSpPr>
-          <p:cNvPr id="32" name="TextBox 31"/>
-          <p:cNvSpPr txBox="1"/>
-          <p:nvPr/>
-        </p:nvSpPr>
-        <p:spPr>
-          <a:xfrm>
-            <a:off x="2606040" y="5166360"/>
+              <a:t>▸  This Deck:</a:t>
+            </a:r>
+          </a:p>
+        </p:txBody>
+      </p:sp>
+      <p:sp>
+        <p:nvSpPr>
+          <p:cNvPr id="33" name="TextBox 32"/>
+          <p:cNvSpPr txBox="1"/>
+          <p:nvPr/>
+        </p:nvSpPr>
+        <p:spPr>
+          <a:xfrm>
+            <a:off x="2606040" y="5925312"/>
             <a:ext cx="8686800" cy="365760"/>
           </a:xfrm>
           <a:prstGeom prst="rect">
@@ -5472,261 +5531,42 @@
                 </a:solidFill>
                 <a:latin typeface="Calibri"/>
               </a:rPr>
-              <a:t>public.tableau.com/&lt;dashboard&gt;  (3 views · 30+ worksheets · 6+ filters)</a:t>
-            </a:r>
-          </a:p>
-        </p:txBody>
-      </p:sp>
-      <p:sp>
-        <p:nvSpPr>
-          <p:cNvPr id="33" name="TextBox 32"/>
-          <p:cNvSpPr txBox="1"/>
-          <p:nvPr/>
-        </p:nvSpPr>
-        <p:spPr>
-          <a:xfrm>
-            <a:off x="777240" y="5486400"/>
-            <a:ext cx="10515600" cy="365760"/>
-          </a:xfrm>
-          <a:prstGeom prst="rect">
-            <a:avLst/>
-          </a:prstGeom>
-          <a:noFill/>
-        </p:spPr>
-        <p:txBody>
-          <a:bodyPr wrap="square" lIns="0" rIns="0" tIns="0" bIns="0" anchor="t">
-            <a:spAutoFit/>
-          </a:bodyPr>
-          <a:lstStyle/>
-          <a:p>
-            <a:pPr algn="l"/>
-            <a:r>
-              <a:rPr sz="1100" b="1" i="0">
+              <a:t>reports/presentation.pdf  (11 slides)</a:t>
+            </a:r>
+          </a:p>
+        </p:txBody>
+      </p:sp>
+      <p:sp>
+        <p:nvSpPr>
+          <p:cNvPr id="34" name="TextBox 33"/>
+          <p:cNvSpPr txBox="1"/>
+          <p:nvPr/>
+        </p:nvSpPr>
+        <p:spPr>
+          <a:xfrm>
+            <a:off x="777240" y="6245352"/>
+            <a:ext cx="10515600" cy="274320"/>
+          </a:xfrm>
+          <a:prstGeom prst="rect">
+            <a:avLst/>
+          </a:prstGeom>
+          <a:noFill/>
+        </p:spPr>
+        <p:txBody>
+          <a:bodyPr wrap="square" lIns="0" rIns="0" tIns="0" bIns="0" anchor="t">
+            <a:spAutoFit/>
+          </a:bodyPr>
+          <a:lstStyle/>
+          <a:p>
+            <a:pPr algn="l"/>
+            <a:r>
+              <a:rPr sz="900" b="0" i="1">
                 <a:solidFill>
                   <a:srgbClr val="CADCFC"/>
                 </a:solidFill>
                 <a:latin typeface="Calibri"/>
               </a:rPr>
-              <a:t>▸  Project Report:</a:t>
-            </a:r>
-          </a:p>
-        </p:txBody>
-      </p:sp>
-      <p:sp>
-        <p:nvSpPr>
-          <p:cNvPr id="34" name="TextBox 33"/>
-          <p:cNvSpPr txBox="1"/>
-          <p:nvPr/>
-        </p:nvSpPr>
-        <p:spPr>
-          <a:xfrm>
-            <a:off x="2606040" y="5486400"/>
-            <a:ext cx="8686800" cy="365760"/>
-          </a:xfrm>
-          <a:prstGeom prst="rect">
-            <a:avLst/>
-          </a:prstGeom>
-          <a:noFill/>
-        </p:spPr>
-        <p:txBody>
-          <a:bodyPr wrap="square" lIns="0" rIns="0" tIns="0" bIns="0" anchor="t">
-            <a:spAutoFit/>
-          </a:bodyPr>
-          <a:lstStyle/>
-          <a:p>
-            <a:pPr algn="l"/>
-            <a:r>
-              <a:rPr sz="1100" b="0" i="0">
-                <a:solidFill>
-                  <a:srgbClr val="FFFFFF"/>
-                </a:solidFill>
-                <a:latin typeface="Calibri"/>
-              </a:rPr>
-              <a:t>reports/project_report.pdf  (18 sections, ~22 pages)</a:t>
-            </a:r>
-          </a:p>
-        </p:txBody>
-      </p:sp>
-      <p:sp>
-        <p:nvSpPr>
-          <p:cNvPr id="35" name="TextBox 34"/>
-          <p:cNvSpPr txBox="1"/>
-          <p:nvPr/>
-        </p:nvSpPr>
-        <p:spPr>
-          <a:xfrm>
-            <a:off x="777240" y="5806440"/>
-            <a:ext cx="10515600" cy="365760"/>
-          </a:xfrm>
-          <a:prstGeom prst="rect">
-            <a:avLst/>
-          </a:prstGeom>
-          <a:noFill/>
-        </p:spPr>
-        <p:txBody>
-          <a:bodyPr wrap="square" lIns="0" rIns="0" tIns="0" bIns="0" anchor="t">
-            <a:spAutoFit/>
-          </a:bodyPr>
-          <a:lstStyle/>
-          <a:p>
-            <a:pPr algn="l"/>
-            <a:r>
-              <a:rPr sz="1100" b="1" i="0">
-                <a:solidFill>
-                  <a:srgbClr val="CADCFC"/>
-                </a:solidFill>
-                <a:latin typeface="Calibri"/>
-              </a:rPr>
-              <a:t>▸  This Deck:</a:t>
-            </a:r>
-          </a:p>
-        </p:txBody>
-      </p:sp>
-      <p:sp>
-        <p:nvSpPr>
-          <p:cNvPr id="36" name="TextBox 35"/>
-          <p:cNvSpPr txBox="1"/>
-          <p:nvPr/>
-        </p:nvSpPr>
-        <p:spPr>
-          <a:xfrm>
-            <a:off x="2606040" y="5806440"/>
-            <a:ext cx="8686800" cy="365760"/>
-          </a:xfrm>
-          <a:prstGeom prst="rect">
-            <a:avLst/>
-          </a:prstGeom>
-          <a:noFill/>
-        </p:spPr>
-        <p:txBody>
-          <a:bodyPr wrap="square" lIns="0" rIns="0" tIns="0" bIns="0" anchor="t">
-            <a:spAutoFit/>
-          </a:bodyPr>
-          <a:lstStyle/>
-          <a:p>
-            <a:pPr algn="l"/>
-            <a:r>
-              <a:rPr sz="1100" b="0" i="0">
-                <a:solidFill>
-                  <a:srgbClr val="FFFFFF"/>
-                </a:solidFill>
-                <a:latin typeface="Calibri"/>
-              </a:rPr>
-              <a:t>reports/presentation.pdf  (11 slides)</a:t>
-            </a:r>
-          </a:p>
-        </p:txBody>
-      </p:sp>
-      <p:sp>
-        <p:nvSpPr>
-          <p:cNvPr id="37" name="Rectangle 36"/>
-          <p:cNvSpPr/>
-          <p:nvPr/>
-        </p:nvSpPr>
-        <p:spPr>
-          <a:xfrm>
-            <a:off x="0" y="6583680"/>
-            <a:ext cx="12191695" cy="274320"/>
-          </a:xfrm>
-          <a:prstGeom prst="rect">
-            <a:avLst/>
-          </a:prstGeom>
-          <a:solidFill>
-            <a:srgbClr val="1E2761"/>
-          </a:solidFill>
-          <a:ln>
-            <a:noFill/>
-          </a:ln>
-          <a:effectLst/>
-        </p:spPr>
-        <p:style>
-          <a:lnRef idx="1">
-            <a:schemeClr val="accent1"/>
-          </a:lnRef>
-          <a:fillRef idx="3">
-            <a:schemeClr val="accent1"/>
-          </a:fillRef>
-          <a:effectRef idx="2">
-            <a:schemeClr val="accent1"/>
-          </a:effectRef>
-          <a:fontRef idx="minor">
-            <a:schemeClr val="lt1"/>
-          </a:fontRef>
-        </p:style>
-        <p:txBody>
-          <a:bodyPr rtlCol="0" anchor="ctr"/>
-          <a:lstStyle/>
-          <a:p>
-            <a:pPr algn="ctr"/>
-          </a:p>
-        </p:txBody>
-      </p:sp>
-      <p:sp>
-        <p:nvSpPr>
-          <p:cNvPr id="38" name="TextBox 37"/>
-          <p:cNvSpPr txBox="1"/>
-          <p:nvPr/>
-        </p:nvSpPr>
-        <p:spPr>
-          <a:xfrm>
-            <a:off x="457200" y="6615684"/>
-            <a:ext cx="7315200" cy="228600"/>
-          </a:xfrm>
-          <a:prstGeom prst="rect">
-            <a:avLst/>
-          </a:prstGeom>
-          <a:noFill/>
-        </p:spPr>
-        <p:txBody>
-          <a:bodyPr wrap="square" lIns="0" rIns="0" tIns="0" bIns="0" anchor="t">
-            <a:spAutoFit/>
-          </a:bodyPr>
-          <a:lstStyle/>
-          <a:p>
-            <a:pPr algn="l"/>
-            <a:r>
-              <a:rPr sz="900" b="0" i="0">
-                <a:solidFill>
-                  <a:srgbClr val="CADCFC"/>
-                </a:solidFill>
-                <a:latin typeface="Calibri"/>
-              </a:rPr>
-              <a:t>Severity Reality Check  ·  NST DVA Capstone 2  ·  April 2026</a:t>
-            </a:r>
-          </a:p>
-        </p:txBody>
-      </p:sp>
-      <p:sp>
-        <p:nvSpPr>
-          <p:cNvPr id="39" name="TextBox 38"/>
-          <p:cNvSpPr txBox="1"/>
-          <p:nvPr/>
-        </p:nvSpPr>
-        <p:spPr>
-          <a:xfrm>
-            <a:off x="10972800" y="6615684"/>
-            <a:ext cx="914400" cy="228600"/>
-          </a:xfrm>
-          <a:prstGeom prst="rect">
-            <a:avLst/>
-          </a:prstGeom>
-          <a:noFill/>
-        </p:spPr>
-        <p:txBody>
-          <a:bodyPr wrap="square" lIns="0" rIns="0" tIns="0" bIns="0" anchor="t">
-            <a:spAutoFit/>
-          </a:bodyPr>
-          <a:lstStyle/>
-          <a:p>
-            <a:pPr algn="r"/>
-            <a:r>
-              <a:rPr sz="900" b="0" i="0">
-                <a:solidFill>
-                  <a:srgbClr val="CADCFC"/>
-                </a:solidFill>
-                <a:latin typeface="Calibri"/>
-              </a:rPr>
-              <a:t>11 / 11</a:t>
+              <a:t>Submitted Apr 29, 2026  ·  Newton School of Technology  ·  DVA Capstone 2</a:t>
             </a:r>
           </a:p>
         </p:txBody>
@@ -6142,7 +5982,7 @@
                 </a:solidFill>
                 <a:latin typeface="Calibri"/>
               </a:rPr>
-              <a:t>How much of what's labeled "severe" in public US accident data is genuinely severe — and how should insurers, DOTs, and logistics planners adjust their decisions to use a bias-corrected signal?</a:t>
+              <a:t>How much of what is labeled "severe" in public US accident data is genuinely severe — and how should insurers, DOTs, and logistics planners adjust their decisions to use a bias-corrected signal?</a:t>
             </a:r>
           </a:p>
         </p:txBody>
@@ -6291,7 +6131,7 @@
                 </a:solidFill>
                 <a:latin typeface="Calibri"/>
               </a:rPr>
-              <a:t>Severity Reality Check  ·  NST DVA Capstone 2  ·  April 2026</a:t>
+              <a:t>DeliverIQ · Severity Reality Check  ·  NST DVA Capstone 2  ·  Section-A · G12</a:t>
             </a:r>
           </a:p>
         </p:txBody>
@@ -7062,7 +6902,7 @@
                 </a:solidFill>
                 <a:latin typeface="Calibri"/>
               </a:rPr>
-              <a:t>6,800+ cities</a:t>
+              <a:t>5,558 cities</a:t>
             </a:r>
           </a:p>
         </p:txBody>
@@ -7528,7 +7368,7 @@
                 </a:solidFill>
                 <a:latin typeface="Calibri"/>
               </a:rPr>
-              <a:t>Severity Reality Check  ·  NST DVA Capstone 2  ·  April 2026</a:t>
+              <a:t>DeliverIQ · Severity Reality Check  ·  NST DVA Capstone 2  ·  Section-A · G12</a:t>
             </a:r>
           </a:p>
         </p:txBody>
@@ -7903,7 +7743,7 @@
                 </a:solidFill>
                 <a:latin typeface="Calibri"/>
               </a:rPr>
-              <a:t>Total Accidents</a:t>
+              <a:t>Total Incidents (95,607)</a:t>
             </a:r>
           </a:p>
           <a:p>
@@ -7928,7 +7768,7 @@
                 </a:solidFill>
                 <a:latin typeface="Calibri"/>
               </a:rPr>
-              <a:t>Nominal Severe (Sev 4)</a:t>
+              <a:t>Critical Accidents (18,023)</a:t>
             </a:r>
           </a:p>
           <a:p>
@@ -7953,7 +7793,7 @@
                 </a:solidFill>
                 <a:latin typeface="Calibri"/>
               </a:rPr>
-              <a:t>True Severe (Sev 4 + Dist ≥ 0.5 mi)</a:t>
+              <a:t>True Severe Accidents (9,155)</a:t>
             </a:r>
           </a:p>
           <a:p>
@@ -7978,7 +7818,7 @@
                 </a:solidFill>
                 <a:latin typeface="Calibri"/>
               </a:rPr>
-              <a:t>True Severe %  ← headline</a:t>
+              <a:t>Avg Duration Severe (1,829 m)</a:t>
             </a:r>
           </a:p>
           <a:p>
@@ -8003,7 +7843,7 @@
                 </a:solidFill>
                 <a:latin typeface="Calibri"/>
               </a:rPr>
-              <a:t>Avg Duration of Severe</a:t>
+              <a:t>Severe Distance (24,415 mi)</a:t>
             </a:r>
           </a:p>
         </p:txBody>
@@ -8128,7 +7968,7 @@
                 </a:solidFill>
                 <a:latin typeface="Calibri"/>
               </a:rPr>
-              <a:t>D2 — When &amp; Where</a:t>
+              <a:t>D2 — When Risk Strikes</a:t>
             </a:r>
           </a:p>
         </p:txBody>
@@ -8211,7 +8051,7 @@
                 </a:solidFill>
                 <a:latin typeface="Calibri"/>
               </a:rPr>
-              <a:t>Worst Season</a:t>
+              <a:t>Worst Season (Winter)</a:t>
             </a:r>
           </a:p>
           <a:p>
@@ -8236,7 +8076,7 @@
                 </a:solidFill>
                 <a:latin typeface="Calibri"/>
               </a:rPr>
-              <a:t>Peak Risk Hour  (12 AM, not rush hour)</a:t>
+              <a:t>Peak Risk Hour (12 AM)</a:t>
             </a:r>
           </a:p>
           <a:p>
@@ -8261,7 +8101,7 @@
                 </a:solidFill>
                 <a:latin typeface="Calibri"/>
               </a:rPr>
-              <a:t>Top State by True Severe  (PA, not CA)</a:t>
+              <a:t>Weekend vs Weekday Δ (+0.34)</a:t>
             </a:r>
           </a:p>
           <a:p>
@@ -8286,7 +8126,7 @@
                 </a:solidFill>
                 <a:latin typeface="Calibri"/>
               </a:rPr>
-              <a:t>Weekend vs Weekday Δ</a:t>
+              <a:t>Night Sev 3+ Share (8.42%)</a:t>
             </a:r>
           </a:p>
           <a:p>
@@ -8311,7 +8151,7 @@
                 </a:solidFill>
                 <a:latin typeface="Calibri"/>
               </a:rPr>
-              <a:t>Cities Tracked</a:t>
+              <a:t>Riskiest Weather (Drifting Snow)</a:t>
             </a:r>
           </a:p>
         </p:txBody>
@@ -8436,7 +8276,7 @@
                 </a:solidFill>
                 <a:latin typeface="Calibri"/>
               </a:rPr>
-              <a:t>D3 — Conditions</a:t>
+              <a:t>D3 — Where &amp; Why</a:t>
             </a:r>
           </a:p>
         </p:txBody>
@@ -8519,7 +8359,7 @@
                 </a:solidFill>
                 <a:latin typeface="Calibri"/>
               </a:rPr>
-              <a:t>Riskiest Weather</a:t>
+              <a:t>Top State by Volume (CA · 8,780)</a:t>
             </a:r>
           </a:p>
           <a:p>
@@ -8544,7 +8384,7 @@
                 </a:solidFill>
                 <a:latin typeface="Calibri"/>
               </a:rPr>
-              <a:t>Junction Lift  (+0.2–0.5 pts)</a:t>
+              <a:t>Top State by Severity (WV)</a:t>
             </a:r>
           </a:p>
           <a:p>
@@ -8569,7 +8409,7 @@
                 </a:solidFill>
                 <a:latin typeface="Calibri"/>
               </a:rPr>
-              <a:t>Signal Drop  (≈0.4 pts)</a:t>
+              <a:t>Junction Severity (+28.8%)</a:t>
             </a:r>
           </a:p>
           <a:p>
@@ -8594,7 +8434,7 @@
                 </a:solidFill>
                 <a:latin typeface="Calibri"/>
               </a:rPr>
-              <a:t>Avg Visibility During Severe</a:t>
+              <a:t>Signal Drop (−62.1%)</a:t>
             </a:r>
           </a:p>
           <a:p>
@@ -8619,7 +8459,7 @@
                 </a:solidFill>
                 <a:latin typeface="Calibri"/>
               </a:rPr>
-              <a:t>Night Severe Share</a:t>
+              <a:t>Cities Tracked (5,558)</a:t>
             </a:r>
           </a:p>
         </p:txBody>
@@ -8698,7 +8538,7 @@
                 </a:solidFill>
                 <a:latin typeface="Calibri"/>
               </a:rPr>
-              <a:t>Severity Reality Check  ·  NST DVA Capstone 2  ·  April 2026</a:t>
+              <a:t>DeliverIQ · Severity Reality Check  ·  NST DVA Capstone 2  ·  Section-A · G12</a:t>
             </a:r>
           </a:p>
         </p:txBody>
@@ -9047,7 +8887,7 @@
                 </a:solidFill>
                 <a:latin typeface="Calibri"/>
               </a:rPr>
-              <a:t>Top-volume states: CA, FL, TX. Top True-Severe state: PA — geography differs once bias is corrected.</a:t>
+              <a:t>Top-volume state: CA (8,780). Top-severity state: WV — geography differs once bias is corrected.</a:t>
             </a:r>
           </a:p>
           <a:p>
@@ -9151,7 +8991,7 @@
                 </a:solidFill>
                 <a:latin typeface="Calibri"/>
               </a:rPr>
-              <a:t>Severity Reality Check  ·  NST DVA Capstone 2  ·  April 2026</a:t>
+              <a:t>DeliverIQ · Severity Reality Check  ·  NST DVA Capstone 2  ·  Section-A · G12</a:t>
             </a:r>
           </a:p>
         </p:txBody>
@@ -10098,7 +9938,7 @@
                 </a:solidFill>
                 <a:latin typeface="Calibri"/>
               </a:rPr>
-              <a:t>PA, WY, MT, NY over-represented in Sev 3+4. Reporting bias is real and must be corrected.</a:t>
+              <a:t>WV, PA, MD, NC over-represented in Sev 3+4. Reporting bias is real and must be corrected.</a:t>
             </a:r>
           </a:p>
         </p:txBody>
@@ -10258,7 +10098,7 @@
                 </a:solidFill>
                 <a:latin typeface="Calibri"/>
               </a:rPr>
-              <a:t>Severity Reality Check  ·  NST DVA Capstone 2  ·  April 2026</a:t>
+              <a:t>DeliverIQ · Severity Reality Check  ·  NST DVA Capstone 2  ·  Section-A · G12</a:t>
             </a:r>
           </a:p>
         </p:txBody>
@@ -10425,7 +10265,7 @@
                 </a:solidFill>
                 <a:latin typeface="Calibri"/>
               </a:rPr>
-              <a:t>Three dashboards, one narrative: What → When/Where → Why</a:t>
+              <a:t>Three dashboards: What → When → Where &amp; Why</a:t>
             </a:r>
           </a:p>
         </p:txBody>
@@ -10438,54 +10278,8 @@
         </p:nvSpPr>
         <p:spPr>
           <a:xfrm>
-            <a:off x="548640" y="1828800"/>
-            <a:ext cx="3657600" cy="4434840"/>
-          </a:xfrm>
-          <a:prstGeom prst="rect">
-            <a:avLst/>
-          </a:prstGeom>
-          <a:solidFill>
-            <a:srgbClr val="FFFFFF"/>
-          </a:solidFill>
-          <a:ln w="6350">
-            <a:solidFill>
-              <a:srgbClr val="CADCFC"/>
-            </a:solidFill>
-          </a:ln>
-          <a:effectLst/>
-        </p:spPr>
-        <p:style>
-          <a:lnRef idx="1">
-            <a:schemeClr val="accent1"/>
-          </a:lnRef>
-          <a:fillRef idx="3">
-            <a:schemeClr val="accent1"/>
-          </a:fillRef>
-          <a:effectRef idx="2">
-            <a:schemeClr val="accent1"/>
-          </a:effectRef>
-          <a:fontRef idx="minor">
-            <a:schemeClr val="lt1"/>
-          </a:fontRef>
-        </p:style>
-        <p:txBody>
-          <a:bodyPr rtlCol="0" anchor="ctr"/>
-          <a:lstStyle/>
-          <a:p>
-            <a:pPr algn="ctr"/>
-          </a:p>
-        </p:txBody>
-      </p:sp>
-      <p:sp>
-        <p:nvSpPr>
-          <p:cNvPr id="6" name="Rectangle 5"/>
-          <p:cNvSpPr/>
-          <p:nvPr/>
-        </p:nvSpPr>
-        <p:spPr>
-          <a:xfrm>
-            <a:off x="548640" y="1828800"/>
-            <a:ext cx="3657600" cy="502920"/>
+            <a:off x="548640" y="1783080"/>
+            <a:ext cx="3657600" cy="365760"/>
           </a:xfrm>
           <a:prstGeom prst="rect">
             <a:avLst/>
@@ -10522,14 +10316,108 @@
       </p:sp>
       <p:sp>
         <p:nvSpPr>
+          <p:cNvPr id="6" name="TextBox 5"/>
+          <p:cNvSpPr txBox="1"/>
+          <p:nvPr/>
+        </p:nvSpPr>
+        <p:spPr>
+          <a:xfrm>
+            <a:off x="685800" y="1828800"/>
+            <a:ext cx="640080" cy="274320"/>
+          </a:xfrm>
+          <a:prstGeom prst="rect">
+            <a:avLst/>
+          </a:prstGeom>
+          <a:noFill/>
+        </p:spPr>
+        <p:txBody>
+          <a:bodyPr wrap="square" lIns="0" rIns="0" tIns="0" bIns="0" anchor="t">
+            <a:spAutoFit/>
+          </a:bodyPr>
+          <a:lstStyle/>
+          <a:p>
+            <a:pPr algn="l"/>
+            <a:r>
+              <a:rPr sz="1100" b="1" i="0">
+                <a:solidFill>
+                  <a:srgbClr val="FFFFFF"/>
+                </a:solidFill>
+                <a:latin typeface="Calibri"/>
+              </a:rPr>
+              <a:t>D1</a:t>
+            </a:r>
+          </a:p>
+        </p:txBody>
+      </p:sp>
+      <p:sp>
+        <p:nvSpPr>
           <p:cNvPr id="7" name="TextBox 6"/>
           <p:cNvSpPr txBox="1"/>
           <p:nvPr/>
         </p:nvSpPr>
         <p:spPr>
           <a:xfrm>
-            <a:off x="731520" y="1874519"/>
-            <a:ext cx="3291840" cy="365760"/>
+            <a:off x="1325880" y="1828800"/>
+            <a:ext cx="2743200" cy="274320"/>
+          </a:xfrm>
+          <a:prstGeom prst="rect">
+            <a:avLst/>
+          </a:prstGeom>
+          <a:noFill/>
+        </p:spPr>
+        <p:txBody>
+          <a:bodyPr wrap="square" lIns="0" rIns="0" tIns="0" bIns="0" anchor="t">
+            <a:spAutoFit/>
+          </a:bodyPr>
+          <a:lstStyle/>
+          <a:p>
+            <a:pPr algn="l"/>
+            <a:r>
+              <a:rPr sz="1100" b="1" i="0">
+                <a:solidFill>
+                  <a:srgbClr val="FFFFFF"/>
+                </a:solidFill>
+                <a:latin typeface="Calibri"/>
+              </a:rPr>
+              <a:t>Severity Reality Check</a:t>
+            </a:r>
+          </a:p>
+        </p:txBody>
+      </p:sp>
+      <p:pic>
+        <p:nvPicPr>
+          <p:cNvPr id="8" name="Picture 7" descr="dashboard_1.png"/>
+          <p:cNvPicPr>
+            <a:picLocks noChangeAspect="1"/>
+          </p:cNvPicPr>
+          <p:nvPr/>
+        </p:nvPicPr>
+        <p:blipFill>
+          <a:blip r:embed="rId2"/>
+          <a:stretch>
+            <a:fillRect/>
+          </a:stretch>
+        </p:blipFill>
+        <p:spPr>
+          <a:xfrm>
+            <a:off x="548640" y="2194560"/>
+            <a:ext cx="3657600" cy="1828800"/>
+          </a:xfrm>
+          <a:prstGeom prst="rect">
+            <a:avLst/>
+          </a:prstGeom>
+        </p:spPr>
+      </p:pic>
+      <p:sp>
+        <p:nvSpPr>
+          <p:cNvPr id="9" name="TextBox 8"/>
+          <p:cNvSpPr txBox="1"/>
+          <p:nvPr/>
+        </p:nvSpPr>
+        <p:spPr>
+          <a:xfrm>
+            <a:off x="548640" y="4160520"/>
+            <a:ext cx="3657600" cy="274320"/>
           </a:xfrm>
           <a:prstGeom prst="rect">
             <a:avLst/>
@@ -10546,60 +10434,60 @@
             <a:r>
               <a:rPr sz="1000" b="1" i="0">
                 <a:solidFill>
-                  <a:srgbClr val="FFFFFF"/>
-                </a:solidFill>
-                <a:latin typeface="Calibri"/>
-              </a:rPr>
-              <a:t>DASHBOARD 1</a:t>
-            </a:r>
-          </a:p>
-        </p:txBody>
-      </p:sp>
-      <p:sp>
-        <p:nvSpPr>
-          <p:cNvPr id="8" name="TextBox 7"/>
-          <p:cNvSpPr txBox="1"/>
-          <p:nvPr/>
-        </p:nvSpPr>
-        <p:spPr>
-          <a:xfrm>
-            <a:off x="731520" y="2121408"/>
-            <a:ext cx="3291840" cy="274320"/>
-          </a:xfrm>
-          <a:prstGeom prst="rect">
-            <a:avLst/>
-          </a:prstGeom>
-          <a:noFill/>
-        </p:spPr>
-        <p:txBody>
-          <a:bodyPr wrap="square" lIns="0" rIns="0" tIns="0" bIns="0" anchor="t">
-            <a:spAutoFit/>
-          </a:bodyPr>
-          <a:lstStyle/>
-          <a:p>
-            <a:pPr algn="l"/>
-            <a:r>
-              <a:rPr sz="1200" b="1" i="0">
-                <a:solidFill>
-                  <a:srgbClr val="FFFFFF"/>
-                </a:solidFill>
-                <a:latin typeface="Calibri"/>
-              </a:rPr>
-              <a:t>Severity Reality Check</a:t>
-            </a:r>
-          </a:p>
-        </p:txBody>
-      </p:sp>
-      <p:sp>
-        <p:nvSpPr>
-          <p:cNvPr id="9" name="TextBox 8"/>
-          <p:cNvSpPr txBox="1"/>
-          <p:nvPr/>
-        </p:nvSpPr>
-        <p:spPr>
-          <a:xfrm>
-            <a:off x="731520" y="2468880"/>
-            <a:ext cx="3291840" cy="274320"/>
+                  <a:srgbClr val="1E2761"/>
+                </a:solidFill>
+                <a:latin typeface="Calibri"/>
+              </a:rPr>
+              <a:t>True Severe = 9,155 of 18,023  (~51%)</a:t>
+            </a:r>
+          </a:p>
+        </p:txBody>
+      </p:sp>
+      <p:sp>
+        <p:nvSpPr>
+          <p:cNvPr id="10" name="TextBox 9"/>
+          <p:cNvSpPr txBox="1"/>
+          <p:nvPr/>
+        </p:nvSpPr>
+        <p:spPr>
+          <a:xfrm>
+            <a:off x="548640" y="4434840"/>
+            <a:ext cx="3657600" cy="365760"/>
+          </a:xfrm>
+          <a:prstGeom prst="rect">
+            <a:avLst/>
+          </a:prstGeom>
+          <a:noFill/>
+        </p:spPr>
+        <p:txBody>
+          <a:bodyPr wrap="square" lIns="0" rIns="0" tIns="0" bIns="0" anchor="t">
+            <a:spAutoFit/>
+          </a:bodyPr>
+          <a:lstStyle/>
+          <a:p>
+            <a:pPr algn="l"/>
+            <a:r>
+              <a:rPr sz="1100" b="0" i="1">
+                <a:solidFill>
+                  <a:srgbClr val="1E293B"/>
+                </a:solidFill>
+                <a:latin typeface="Calibri"/>
+              </a:rPr>
+              <a:t>Half of "severe" is congestion noise.</a:t>
+            </a:r>
+          </a:p>
+        </p:txBody>
+      </p:sp>
+      <p:sp>
+        <p:nvSpPr>
+          <p:cNvPr id="11" name="TextBox 10"/>
+          <p:cNvSpPr txBox="1"/>
+          <p:nvPr/>
+        </p:nvSpPr>
+        <p:spPr>
+          <a:xfrm>
+            <a:off x="548640" y="4846320"/>
+            <a:ext cx="3657600" cy="274320"/>
           </a:xfrm>
           <a:prstGeom prst="rect">
             <a:avLst/>
@@ -10620,172 +10508,21 @@
                 </a:solidFill>
                 <a:latin typeface="Calibri"/>
               </a:rPr>
-              <a:t>KPI STRIP</a:t>
-            </a:r>
-          </a:p>
-        </p:txBody>
-      </p:sp>
-      <p:sp>
-        <p:nvSpPr>
-          <p:cNvPr id="10" name="TextBox 9"/>
-          <p:cNvSpPr txBox="1"/>
-          <p:nvPr/>
-        </p:nvSpPr>
-        <p:spPr>
-          <a:xfrm>
-            <a:off x="731520" y="2743200"/>
-            <a:ext cx="3291840" cy="1371600"/>
-          </a:xfrm>
-          <a:prstGeom prst="rect">
-            <a:avLst/>
-          </a:prstGeom>
-          <a:noFill/>
-        </p:spPr>
-        <p:txBody>
-          <a:bodyPr wrap="square" lIns="0" rIns="0" tIns="0" bIns="0" anchor="t">
-            <a:spAutoFit/>
-          </a:bodyPr>
-          <a:lstStyle/>
-          <a:p>
-            <a:pPr algn="l"/>
-            <a:r>
-              <a:rPr sz="1000" b="0" i="0">
-                <a:solidFill>
-                  <a:srgbClr val="1E293B"/>
-                </a:solidFill>
-                <a:latin typeface="Calibri"/>
-              </a:rPr>
-              <a:t>Total · Nominal Severe · True Severe · True Severe % · Avg Severe Duration</a:t>
-            </a:r>
-          </a:p>
-        </p:txBody>
-      </p:sp>
-      <p:sp>
-        <p:nvSpPr>
-          <p:cNvPr id="11" name="TextBox 10"/>
-          <p:cNvSpPr txBox="1"/>
-          <p:nvPr/>
-        </p:nvSpPr>
-        <p:spPr>
-          <a:xfrm>
-            <a:off x="731520" y="4206240"/>
-            <a:ext cx="3291840" cy="274320"/>
-          </a:xfrm>
-          <a:prstGeom prst="rect">
-            <a:avLst/>
-          </a:prstGeom>
-          <a:noFill/>
-        </p:spPr>
-        <p:txBody>
-          <a:bodyPr wrap="square" lIns="0" rIns="0" tIns="0" bIns="0" anchor="t">
-            <a:spAutoFit/>
-          </a:bodyPr>
-          <a:lstStyle/>
-          <a:p>
-            <a:pPr algn="l"/>
-            <a:r>
-              <a:rPr sz="900" b="1" i="0">
-                <a:solidFill>
-                  <a:srgbClr val="64748B"/>
-                </a:solidFill>
-                <a:latin typeface="Calibri"/>
-              </a:rPr>
-              <a:t>CHARTS</a:t>
-            </a:r>
-          </a:p>
-        </p:txBody>
-      </p:sp>
-      <p:sp>
-        <p:nvSpPr>
-          <p:cNvPr id="12" name="TextBox 11"/>
-          <p:cNvSpPr txBox="1"/>
-          <p:nvPr/>
-        </p:nvSpPr>
-        <p:spPr>
-          <a:xfrm>
-            <a:off x="731520" y="4480560"/>
-            <a:ext cx="3291840" cy="1737360"/>
-          </a:xfrm>
-          <a:prstGeom prst="rect">
-            <a:avLst/>
-          </a:prstGeom>
-          <a:noFill/>
-        </p:spPr>
-        <p:txBody>
-          <a:bodyPr wrap="square" lIns="0" rIns="0" tIns="0" bIns="0" anchor="t">
-            <a:spAutoFit/>
-          </a:bodyPr>
-          <a:lstStyle/>
-          <a:p>
-            <a:pPr algn="l"/>
-            <a:r>
-              <a:rPr sz="1000" b="0" i="0">
-                <a:solidFill>
-                  <a:srgbClr val="1E293B"/>
-                </a:solidFill>
-                <a:latin typeface="Calibri"/>
-              </a:rPr>
-              <a:t>Severity Donut · Nominal vs True Severe · Rush Hour Comparison · Hourly Severity Trend</a:t>
-            </a:r>
-          </a:p>
-        </p:txBody>
-      </p:sp>
-      <p:sp>
-        <p:nvSpPr>
-          <p:cNvPr id="13" name="Rectangle 12"/>
+              <a:t>THE HOOK</a:t>
+            </a:r>
+          </a:p>
+        </p:txBody>
+      </p:sp>
+      <p:sp>
+        <p:nvSpPr>
+          <p:cNvPr id="12" name="Rectangle 11"/>
           <p:cNvSpPr/>
           <p:nvPr/>
         </p:nvSpPr>
         <p:spPr>
           <a:xfrm>
-            <a:off x="4343400" y="1828800"/>
-            <a:ext cx="3657600" cy="4434840"/>
-          </a:xfrm>
-          <a:prstGeom prst="rect">
-            <a:avLst/>
-          </a:prstGeom>
-          <a:solidFill>
-            <a:srgbClr val="FFFFFF"/>
-          </a:solidFill>
-          <a:ln w="6350">
-            <a:solidFill>
-              <a:srgbClr val="CADCFC"/>
-            </a:solidFill>
-          </a:ln>
-          <a:effectLst/>
-        </p:spPr>
-        <p:style>
-          <a:lnRef idx="1">
-            <a:schemeClr val="accent1"/>
-          </a:lnRef>
-          <a:fillRef idx="3">
-            <a:schemeClr val="accent1"/>
-          </a:fillRef>
-          <a:effectRef idx="2">
-            <a:schemeClr val="accent1"/>
-          </a:effectRef>
-          <a:fontRef idx="minor">
-            <a:schemeClr val="lt1"/>
-          </a:fontRef>
-        </p:style>
-        <p:txBody>
-          <a:bodyPr rtlCol="0" anchor="ctr"/>
-          <a:lstStyle/>
-          <a:p>
-            <a:pPr algn="ctr"/>
-          </a:p>
-        </p:txBody>
-      </p:sp>
-      <p:sp>
-        <p:nvSpPr>
-          <p:cNvPr id="14" name="Rectangle 13"/>
-          <p:cNvSpPr/>
-          <p:nvPr/>
-        </p:nvSpPr>
-        <p:spPr>
-          <a:xfrm>
-            <a:off x="4343400" y="1828800"/>
-            <a:ext cx="3657600" cy="502920"/>
+            <a:off x="4343400" y="1783080"/>
+            <a:ext cx="3657600" cy="365760"/>
           </a:xfrm>
           <a:prstGeom prst="rect">
             <a:avLst/>
@@ -10822,14 +10559,108 @@
       </p:sp>
       <p:sp>
         <p:nvSpPr>
-          <p:cNvPr id="15" name="TextBox 14"/>
-          <p:cNvSpPr txBox="1"/>
-          <p:nvPr/>
-        </p:nvSpPr>
-        <p:spPr>
-          <a:xfrm>
-            <a:off x="4526280" y="1874519"/>
-            <a:ext cx="3291840" cy="365760"/>
+          <p:cNvPr id="13" name="TextBox 12"/>
+          <p:cNvSpPr txBox="1"/>
+          <p:nvPr/>
+        </p:nvSpPr>
+        <p:spPr>
+          <a:xfrm>
+            <a:off x="4480560" y="1828800"/>
+            <a:ext cx="640080" cy="274320"/>
+          </a:xfrm>
+          <a:prstGeom prst="rect">
+            <a:avLst/>
+          </a:prstGeom>
+          <a:noFill/>
+        </p:spPr>
+        <p:txBody>
+          <a:bodyPr wrap="square" lIns="0" rIns="0" tIns="0" bIns="0" anchor="t">
+            <a:spAutoFit/>
+          </a:bodyPr>
+          <a:lstStyle/>
+          <a:p>
+            <a:pPr algn="l"/>
+            <a:r>
+              <a:rPr sz="1100" b="1" i="0">
+                <a:solidFill>
+                  <a:srgbClr val="FFFFFF"/>
+                </a:solidFill>
+                <a:latin typeface="Calibri"/>
+              </a:rPr>
+              <a:t>D2</a:t>
+            </a:r>
+          </a:p>
+        </p:txBody>
+      </p:sp>
+      <p:sp>
+        <p:nvSpPr>
+          <p:cNvPr id="14" name="TextBox 13"/>
+          <p:cNvSpPr txBox="1"/>
+          <p:nvPr/>
+        </p:nvSpPr>
+        <p:spPr>
+          <a:xfrm>
+            <a:off x="5120640" y="1828800"/>
+            <a:ext cx="2743200" cy="274320"/>
+          </a:xfrm>
+          <a:prstGeom prst="rect">
+            <a:avLst/>
+          </a:prstGeom>
+          <a:noFill/>
+        </p:spPr>
+        <p:txBody>
+          <a:bodyPr wrap="square" lIns="0" rIns="0" tIns="0" bIns="0" anchor="t">
+            <a:spAutoFit/>
+          </a:bodyPr>
+          <a:lstStyle/>
+          <a:p>
+            <a:pPr algn="l"/>
+            <a:r>
+              <a:rPr sz="1100" b="1" i="0">
+                <a:solidFill>
+                  <a:srgbClr val="FFFFFF"/>
+                </a:solidFill>
+                <a:latin typeface="Calibri"/>
+              </a:rPr>
+              <a:t>When Risk Strikes</a:t>
+            </a:r>
+          </a:p>
+        </p:txBody>
+      </p:sp>
+      <p:pic>
+        <p:nvPicPr>
+          <p:cNvPr id="15" name="Picture 14" descr="dashboard_2.png"/>
+          <p:cNvPicPr>
+            <a:picLocks noChangeAspect="1"/>
+          </p:cNvPicPr>
+          <p:nvPr/>
+        </p:nvPicPr>
+        <p:blipFill>
+          <a:blip r:embed="rId3"/>
+          <a:stretch>
+            <a:fillRect/>
+          </a:stretch>
+        </p:blipFill>
+        <p:spPr>
+          <a:xfrm>
+            <a:off x="4343400" y="2194560"/>
+            <a:ext cx="3657600" cy="1828800"/>
+          </a:xfrm>
+          <a:prstGeom prst="rect">
+            <a:avLst/>
+          </a:prstGeom>
+        </p:spPr>
+      </p:pic>
+      <p:sp>
+        <p:nvSpPr>
+          <p:cNvPr id="16" name="TextBox 15"/>
+          <p:cNvSpPr txBox="1"/>
+          <p:nvPr/>
+        </p:nvSpPr>
+        <p:spPr>
+          <a:xfrm>
+            <a:off x="4343400" y="4160520"/>
+            <a:ext cx="3657600" cy="274320"/>
           </a:xfrm>
           <a:prstGeom prst="rect">
             <a:avLst/>
@@ -10846,46 +10677,11 @@
             <a:r>
               <a:rPr sz="1000" b="1" i="0">
                 <a:solidFill>
-                  <a:srgbClr val="FFFFFF"/>
-                </a:solidFill>
-                <a:latin typeface="Calibri"/>
-              </a:rPr>
-              <a:t>DASHBOARD 2</a:t>
-            </a:r>
-          </a:p>
-        </p:txBody>
-      </p:sp>
-      <p:sp>
-        <p:nvSpPr>
-          <p:cNvPr id="16" name="TextBox 15"/>
-          <p:cNvSpPr txBox="1"/>
-          <p:nvPr/>
-        </p:nvSpPr>
-        <p:spPr>
-          <a:xfrm>
-            <a:off x="4526280" y="2121408"/>
-            <a:ext cx="3291840" cy="274320"/>
-          </a:xfrm>
-          <a:prstGeom prst="rect">
-            <a:avLst/>
-          </a:prstGeom>
-          <a:noFill/>
-        </p:spPr>
-        <p:txBody>
-          <a:bodyPr wrap="square" lIns="0" rIns="0" tIns="0" bIns="0" anchor="t">
-            <a:spAutoFit/>
-          </a:bodyPr>
-          <a:lstStyle/>
-          <a:p>
-            <a:pPr algn="l"/>
-            <a:r>
-              <a:rPr sz="1200" b="1" i="0">
-                <a:solidFill>
-                  <a:srgbClr val="FFFFFF"/>
-                </a:solidFill>
-                <a:latin typeface="Calibri"/>
-              </a:rPr>
-              <a:t>When &amp; Where</a:t>
+                  <a:srgbClr val="F96167"/>
+                </a:solidFill>
+                <a:latin typeface="Calibri"/>
+              </a:rPr>
+              <a:t>Peak Risk Hour: 12 AM   ·   Worst Season: Winter</a:t>
             </a:r>
           </a:p>
         </p:txBody>
@@ -10898,8 +10694,43 @@
         </p:nvSpPr>
         <p:spPr>
           <a:xfrm>
-            <a:off x="4526280" y="2468880"/>
-            <a:ext cx="3291840" cy="274320"/>
+            <a:off x="4343400" y="4434840"/>
+            <a:ext cx="3657600" cy="365760"/>
+          </a:xfrm>
+          <a:prstGeom prst="rect">
+            <a:avLst/>
+          </a:prstGeom>
+          <a:noFill/>
+        </p:spPr>
+        <p:txBody>
+          <a:bodyPr wrap="square" lIns="0" rIns="0" tIns="0" bIns="0" anchor="t">
+            <a:spAutoFit/>
+          </a:bodyPr>
+          <a:lstStyle/>
+          <a:p>
+            <a:pPr algn="l"/>
+            <a:r>
+              <a:rPr sz="1100" b="0" i="1">
+                <a:solidFill>
+                  <a:srgbClr val="1E293B"/>
+                </a:solidFill>
+                <a:latin typeface="Calibri"/>
+              </a:rPr>
+              <a:t>Risk peaks at midnight, not rush hour.</a:t>
+            </a:r>
+          </a:p>
+        </p:txBody>
+      </p:sp>
+      <p:sp>
+        <p:nvSpPr>
+          <p:cNvPr id="18" name="TextBox 17"/>
+          <p:cNvSpPr txBox="1"/>
+          <p:nvPr/>
+        </p:nvSpPr>
+        <p:spPr>
+          <a:xfrm>
+            <a:off x="4343400" y="4846320"/>
+            <a:ext cx="3657600" cy="274320"/>
           </a:xfrm>
           <a:prstGeom prst="rect">
             <a:avLst/>
@@ -10920,172 +10751,21 @@
                 </a:solidFill>
                 <a:latin typeface="Calibri"/>
               </a:rPr>
-              <a:t>KPI STRIP</a:t>
-            </a:r>
-          </a:p>
-        </p:txBody>
-      </p:sp>
-      <p:sp>
-        <p:nvSpPr>
-          <p:cNvPr id="18" name="TextBox 17"/>
-          <p:cNvSpPr txBox="1"/>
-          <p:nvPr/>
-        </p:nvSpPr>
-        <p:spPr>
-          <a:xfrm>
-            <a:off x="4526280" y="2743200"/>
-            <a:ext cx="3291840" cy="1371600"/>
-          </a:xfrm>
-          <a:prstGeom prst="rect">
-            <a:avLst/>
-          </a:prstGeom>
-          <a:noFill/>
-        </p:spPr>
-        <p:txBody>
-          <a:bodyPr wrap="square" lIns="0" rIns="0" tIns="0" bIns="0" anchor="t">
-            <a:spAutoFit/>
-          </a:bodyPr>
-          <a:lstStyle/>
-          <a:p>
-            <a:pPr algn="l"/>
-            <a:r>
-              <a:rPr sz="1000" b="0" i="0">
-                <a:solidFill>
-                  <a:srgbClr val="1E293B"/>
-                </a:solidFill>
-                <a:latin typeface="Calibri"/>
-              </a:rPr>
-              <a:t>Worst Season · Peak Risk Hour · Top State by True Severe · Weekend vs Weekday Δ · Cities Tracked</a:t>
-            </a:r>
-          </a:p>
-        </p:txBody>
-      </p:sp>
-      <p:sp>
-        <p:nvSpPr>
-          <p:cNvPr id="19" name="TextBox 18"/>
-          <p:cNvSpPr txBox="1"/>
-          <p:nvPr/>
-        </p:nvSpPr>
-        <p:spPr>
-          <a:xfrm>
-            <a:off x="4526280" y="4206240"/>
-            <a:ext cx="3291840" cy="274320"/>
-          </a:xfrm>
-          <a:prstGeom prst="rect">
-            <a:avLst/>
-          </a:prstGeom>
-          <a:noFill/>
-        </p:spPr>
-        <p:txBody>
-          <a:bodyPr wrap="square" lIns="0" rIns="0" tIns="0" bIns="0" anchor="t">
-            <a:spAutoFit/>
-          </a:bodyPr>
-          <a:lstStyle/>
-          <a:p>
-            <a:pPr algn="l"/>
-            <a:r>
-              <a:rPr sz="900" b="1" i="0">
-                <a:solidFill>
-                  <a:srgbClr val="64748B"/>
-                </a:solidFill>
-                <a:latin typeface="Calibri"/>
-              </a:rPr>
-              <a:t>CHARTS</a:t>
-            </a:r>
-          </a:p>
-        </p:txBody>
-      </p:sp>
-      <p:sp>
-        <p:nvSpPr>
-          <p:cNvPr id="20" name="TextBox 19"/>
-          <p:cNvSpPr txBox="1"/>
-          <p:nvPr/>
-        </p:nvSpPr>
-        <p:spPr>
-          <a:xfrm>
-            <a:off x="4526280" y="4480560"/>
-            <a:ext cx="3291840" cy="1737360"/>
-          </a:xfrm>
-          <a:prstGeom prst="rect">
-            <a:avLst/>
-          </a:prstGeom>
-          <a:noFill/>
-        </p:spPr>
-        <p:txBody>
-          <a:bodyPr wrap="square" lIns="0" rIns="0" tIns="0" bIns="0" anchor="t">
-            <a:spAutoFit/>
-          </a:bodyPr>
-          <a:lstStyle/>
-          <a:p>
-            <a:pPr algn="l"/>
-            <a:r>
-              <a:rPr sz="1000" b="0" i="0">
-                <a:solidFill>
-                  <a:srgbClr val="1E293B"/>
-                </a:solidFill>
-                <a:latin typeface="Calibri"/>
-              </a:rPr>
-              <a:t>Day × Hour Heatmap · Top 12 States · Time-of-Day Severity Bar · Region Comparison</a:t>
-            </a:r>
-          </a:p>
-        </p:txBody>
-      </p:sp>
-      <p:sp>
-        <p:nvSpPr>
-          <p:cNvPr id="21" name="Rectangle 20"/>
+              <a:t>THE DIAGNOSIS</a:t>
+            </a:r>
+          </a:p>
+        </p:txBody>
+      </p:sp>
+      <p:sp>
+        <p:nvSpPr>
+          <p:cNvPr id="19" name="Rectangle 18"/>
           <p:cNvSpPr/>
           <p:nvPr/>
         </p:nvSpPr>
         <p:spPr>
           <a:xfrm>
-            <a:off x="8138160" y="1828800"/>
-            <a:ext cx="3657600" cy="4434840"/>
-          </a:xfrm>
-          <a:prstGeom prst="rect">
-            <a:avLst/>
-          </a:prstGeom>
-          <a:solidFill>
-            <a:srgbClr val="FFFFFF"/>
-          </a:solidFill>
-          <a:ln w="6350">
-            <a:solidFill>
-              <a:srgbClr val="CADCFC"/>
-            </a:solidFill>
-          </a:ln>
-          <a:effectLst/>
-        </p:spPr>
-        <p:style>
-          <a:lnRef idx="1">
-            <a:schemeClr val="accent1"/>
-          </a:lnRef>
-          <a:fillRef idx="3">
-            <a:schemeClr val="accent1"/>
-          </a:fillRef>
-          <a:effectRef idx="2">
-            <a:schemeClr val="accent1"/>
-          </a:effectRef>
-          <a:fontRef idx="minor">
-            <a:schemeClr val="lt1"/>
-          </a:fontRef>
-        </p:style>
-        <p:txBody>
-          <a:bodyPr rtlCol="0" anchor="ctr"/>
-          <a:lstStyle/>
-          <a:p>
-            <a:pPr algn="ctr"/>
-          </a:p>
-        </p:txBody>
-      </p:sp>
-      <p:sp>
-        <p:nvSpPr>
-          <p:cNvPr id="22" name="Rectangle 21"/>
-          <p:cNvSpPr/>
-          <p:nvPr/>
-        </p:nvSpPr>
-        <p:spPr>
-          <a:xfrm>
-            <a:off x="8138160" y="1828800"/>
-            <a:ext cx="3657600" cy="502920"/>
+            <a:off x="8138160" y="1783080"/>
+            <a:ext cx="3657600" cy="365760"/>
           </a:xfrm>
           <a:prstGeom prst="rect">
             <a:avLst/>
@@ -11122,14 +10802,108 @@
       </p:sp>
       <p:sp>
         <p:nvSpPr>
+          <p:cNvPr id="20" name="TextBox 19"/>
+          <p:cNvSpPr txBox="1"/>
+          <p:nvPr/>
+        </p:nvSpPr>
+        <p:spPr>
+          <a:xfrm>
+            <a:off x="8275320" y="1828800"/>
+            <a:ext cx="640080" cy="274320"/>
+          </a:xfrm>
+          <a:prstGeom prst="rect">
+            <a:avLst/>
+          </a:prstGeom>
+          <a:noFill/>
+        </p:spPr>
+        <p:txBody>
+          <a:bodyPr wrap="square" lIns="0" rIns="0" tIns="0" bIns="0" anchor="t">
+            <a:spAutoFit/>
+          </a:bodyPr>
+          <a:lstStyle/>
+          <a:p>
+            <a:pPr algn="l"/>
+            <a:r>
+              <a:rPr sz="1100" b="1" i="0">
+                <a:solidFill>
+                  <a:srgbClr val="FFFFFF"/>
+                </a:solidFill>
+                <a:latin typeface="Calibri"/>
+              </a:rPr>
+              <a:t>D3</a:t>
+            </a:r>
+          </a:p>
+        </p:txBody>
+      </p:sp>
+      <p:sp>
+        <p:nvSpPr>
+          <p:cNvPr id="21" name="TextBox 20"/>
+          <p:cNvSpPr txBox="1"/>
+          <p:nvPr/>
+        </p:nvSpPr>
+        <p:spPr>
+          <a:xfrm>
+            <a:off x="8915400" y="1828800"/>
+            <a:ext cx="2743200" cy="274320"/>
+          </a:xfrm>
+          <a:prstGeom prst="rect">
+            <a:avLst/>
+          </a:prstGeom>
+          <a:noFill/>
+        </p:spPr>
+        <p:txBody>
+          <a:bodyPr wrap="square" lIns="0" rIns="0" tIns="0" bIns="0" anchor="t">
+            <a:spAutoFit/>
+          </a:bodyPr>
+          <a:lstStyle/>
+          <a:p>
+            <a:pPr algn="l"/>
+            <a:r>
+              <a:rPr sz="1100" b="1" i="0">
+                <a:solidFill>
+                  <a:srgbClr val="FFFFFF"/>
+                </a:solidFill>
+                <a:latin typeface="Calibri"/>
+              </a:rPr>
+              <a:t>Where &amp; Why</a:t>
+            </a:r>
+          </a:p>
+        </p:txBody>
+      </p:sp>
+      <p:pic>
+        <p:nvPicPr>
+          <p:cNvPr id="22" name="Picture 21" descr="dashboard_3.png"/>
+          <p:cNvPicPr>
+            <a:picLocks noChangeAspect="1"/>
+          </p:cNvPicPr>
+          <p:nvPr/>
+        </p:nvPicPr>
+        <p:blipFill>
+          <a:blip r:embed="rId4"/>
+          <a:stretch>
+            <a:fillRect/>
+          </a:stretch>
+        </p:blipFill>
+        <p:spPr>
+          <a:xfrm>
+            <a:off x="8138160" y="2194560"/>
+            <a:ext cx="3657600" cy="1828800"/>
+          </a:xfrm>
+          <a:prstGeom prst="rect">
+            <a:avLst/>
+          </a:prstGeom>
+        </p:spPr>
+      </p:pic>
+      <p:sp>
+        <p:nvSpPr>
           <p:cNvPr id="23" name="TextBox 22"/>
           <p:cNvSpPr txBox="1"/>
           <p:nvPr/>
         </p:nvSpPr>
         <p:spPr>
           <a:xfrm>
-            <a:off x="8321040" y="1874519"/>
-            <a:ext cx="3291840" cy="365760"/>
+            <a:off x="8138160" y="4160520"/>
+            <a:ext cx="3657600" cy="274320"/>
           </a:xfrm>
           <a:prstGeom prst="rect">
             <a:avLst/>
@@ -11146,11 +10920,11 @@
             <a:r>
               <a:rPr sz="1000" b="1" i="0">
                 <a:solidFill>
-                  <a:srgbClr val="FFFFFF"/>
-                </a:solidFill>
-                <a:latin typeface="Calibri"/>
-              </a:rPr>
-              <a:t>DASHBOARD 3</a:t>
+                  <a:srgbClr val="1E2761"/>
+                </a:solidFill>
+                <a:latin typeface="Calibri"/>
+              </a:rPr>
+              <a:t>Junction +28.8%   ·   Signal −62.1%   ·   Top: WV</a:t>
             </a:r>
           </a:p>
         </p:txBody>
@@ -11163,29 +10937,29 @@
         </p:nvSpPr>
         <p:spPr>
           <a:xfrm>
-            <a:off x="8321040" y="2121408"/>
-            <a:ext cx="3291840" cy="274320"/>
-          </a:xfrm>
-          <a:prstGeom prst="rect">
-            <a:avLst/>
-          </a:prstGeom>
-          <a:noFill/>
-        </p:spPr>
-        <p:txBody>
-          <a:bodyPr wrap="square" lIns="0" rIns="0" tIns="0" bIns="0" anchor="t">
-            <a:spAutoFit/>
-          </a:bodyPr>
-          <a:lstStyle/>
-          <a:p>
-            <a:pPr algn="l"/>
-            <a:r>
-              <a:rPr sz="1200" b="1" i="0">
-                <a:solidFill>
-                  <a:srgbClr val="FFFFFF"/>
-                </a:solidFill>
-                <a:latin typeface="Calibri"/>
-              </a:rPr>
-              <a:t>Conditions</a:t>
+            <a:off x="8138160" y="4434840"/>
+            <a:ext cx="3657600" cy="365760"/>
+          </a:xfrm>
+          <a:prstGeom prst="rect">
+            <a:avLst/>
+          </a:prstGeom>
+          <a:noFill/>
+        </p:spPr>
+        <p:txBody>
+          <a:bodyPr wrap="square" lIns="0" rIns="0" tIns="0" bIns="0" anchor="t">
+            <a:spAutoFit/>
+          </a:bodyPr>
+          <a:lstStyle/>
+          <a:p>
+            <a:pPr algn="l"/>
+            <a:r>
+              <a:rPr sz="1100" b="0" i="1">
+                <a:solidFill>
+                  <a:srgbClr val="1E293B"/>
+                </a:solidFill>
+                <a:latin typeface="Calibri"/>
+              </a:rPr>
+              <a:t>Infrastructure has measurable lifts.</a:t>
             </a:r>
           </a:p>
         </p:txBody>
@@ -11198,8 +10972,8 @@
         </p:nvSpPr>
         <p:spPr>
           <a:xfrm>
-            <a:off x="8321040" y="2468880"/>
-            <a:ext cx="3291840" cy="274320"/>
+            <a:off x="8138160" y="4846320"/>
+            <a:ext cx="3657600" cy="274320"/>
           </a:xfrm>
           <a:prstGeom prst="rect">
             <a:avLst/>
@@ -11220,7 +10994,7 @@
                 </a:solidFill>
                 <a:latin typeface="Calibri"/>
               </a:rPr>
-              <a:t>KPI STRIP</a:t>
+              <a:t>THE CAUSE</a:t>
             </a:r>
           </a:p>
         </p:txBody>
@@ -11233,141 +11007,36 @@
         </p:nvSpPr>
         <p:spPr>
           <a:xfrm>
-            <a:off x="8321040" y="2743200"/>
-            <a:ext cx="3291840" cy="1371600"/>
-          </a:xfrm>
-          <a:prstGeom prst="rect">
-            <a:avLst/>
-          </a:prstGeom>
-          <a:noFill/>
-        </p:spPr>
-        <p:txBody>
-          <a:bodyPr wrap="square" lIns="0" rIns="0" tIns="0" bIns="0" anchor="t">
-            <a:spAutoFit/>
-          </a:bodyPr>
-          <a:lstStyle/>
-          <a:p>
-            <a:pPr algn="l"/>
-            <a:r>
-              <a:rPr sz="1000" b="0" i="0">
-                <a:solidFill>
-                  <a:srgbClr val="1E293B"/>
-                </a:solidFill>
-                <a:latin typeface="Calibri"/>
-              </a:rPr>
-              <a:t>Riskiest Weather · Junction Lift · Signal Drop · Avg Visibility During Severe · Night Severe Share</a:t>
-            </a:r>
-          </a:p>
-        </p:txBody>
-      </p:sp>
-      <p:sp>
-        <p:nvSpPr>
-          <p:cNvPr id="27" name="TextBox 26"/>
-          <p:cNvSpPr txBox="1"/>
-          <p:nvPr/>
-        </p:nvSpPr>
-        <p:spPr>
-          <a:xfrm>
-            <a:off x="8321040" y="4206240"/>
-            <a:ext cx="3291840" cy="274320"/>
-          </a:xfrm>
-          <a:prstGeom prst="rect">
-            <a:avLst/>
-          </a:prstGeom>
-          <a:noFill/>
-        </p:spPr>
-        <p:txBody>
-          <a:bodyPr wrap="square" lIns="0" rIns="0" tIns="0" bIns="0" anchor="t">
-            <a:spAutoFit/>
-          </a:bodyPr>
-          <a:lstStyle/>
-          <a:p>
-            <a:pPr algn="l"/>
-            <a:r>
-              <a:rPr sz="900" b="1" i="0">
+            <a:off x="548640" y="6263640"/>
+            <a:ext cx="10972800" cy="274320"/>
+          </a:xfrm>
+          <a:prstGeom prst="rect">
+            <a:avLst/>
+          </a:prstGeom>
+          <a:noFill/>
+        </p:spPr>
+        <p:txBody>
+          <a:bodyPr wrap="square" lIns="0" rIns="0" tIns="0" bIns="0" anchor="t">
+            <a:spAutoFit/>
+          </a:bodyPr>
+          <a:lstStyle/>
+          <a:p>
+            <a:pPr algn="l"/>
+            <a:r>
+              <a:rPr sz="1000" b="0" i="1">
                 <a:solidFill>
                   <a:srgbClr val="64748B"/>
                 </a:solidFill>
                 <a:latin typeface="Calibri"/>
               </a:rPr>
-              <a:t>CHARTS</a:t>
-            </a:r>
-          </a:p>
-        </p:txBody>
-      </p:sp>
-      <p:sp>
-        <p:nvSpPr>
-          <p:cNvPr id="28" name="TextBox 27"/>
-          <p:cNvSpPr txBox="1"/>
-          <p:nvPr/>
-        </p:nvSpPr>
-        <p:spPr>
-          <a:xfrm>
-            <a:off x="8321040" y="4480560"/>
-            <a:ext cx="3291840" cy="1737360"/>
-          </a:xfrm>
-          <a:prstGeom prst="rect">
-            <a:avLst/>
-          </a:prstGeom>
-          <a:noFill/>
-        </p:spPr>
-        <p:txBody>
-          <a:bodyPr wrap="square" lIns="0" rIns="0" tIns="0" bIns="0" anchor="t">
-            <a:spAutoFit/>
-          </a:bodyPr>
-          <a:lstStyle/>
-          <a:p>
-            <a:pPr algn="l"/>
-            <a:r>
-              <a:rPr sz="1000" b="0" i="0">
-                <a:solidFill>
-                  <a:srgbClr val="1E293B"/>
-                </a:solidFill>
-                <a:latin typeface="Calibri"/>
-              </a:rPr>
-              <a:t>Weather × Severity · Visibility Bucket × Severity · Road Feature Lifts · Temp × Sev by Season</a:t>
-            </a:r>
-          </a:p>
-        </p:txBody>
-      </p:sp>
-      <p:sp>
-        <p:nvSpPr>
-          <p:cNvPr id="29" name="TextBox 28"/>
-          <p:cNvSpPr txBox="1"/>
-          <p:nvPr/>
-        </p:nvSpPr>
-        <p:spPr>
-          <a:xfrm>
-            <a:off x="548640" y="6355080"/>
-            <a:ext cx="10972800" cy="274320"/>
-          </a:xfrm>
-          <a:prstGeom prst="rect">
-            <a:avLst/>
-          </a:prstGeom>
-          <a:noFill/>
-        </p:spPr>
-        <p:txBody>
-          <a:bodyPr wrap="square" lIns="0" rIns="0" tIns="0" bIns="0" anchor="t">
-            <a:spAutoFit/>
-          </a:bodyPr>
-          <a:lstStyle/>
-          <a:p>
-            <a:pPr algn="l"/>
-            <a:r>
-              <a:rPr sz="1000" b="0" i="1">
-                <a:solidFill>
-                  <a:srgbClr val="64748B"/>
-                </a:solidFill>
-                <a:latin typeface="Calibri"/>
-              </a:rPr>
-              <a:t>6+ interactive filters across dashboards: Severity · State · Year · Time-of-Day · Season · Weather · Visibility</a:t>
-            </a:r>
-          </a:p>
-        </p:txBody>
-      </p:sp>
-      <p:sp>
-        <p:nvSpPr>
-          <p:cNvPr id="30" name="Rectangle 29"/>
+              <a:t>Interactive filters: Rush Hour · Severity · Visibility Bucket · Time of Day  (across 30+ worksheets)</a:t>
+            </a:r>
+          </a:p>
+        </p:txBody>
+      </p:sp>
+      <p:sp>
+        <p:nvSpPr>
+          <p:cNvPr id="27" name="Rectangle 26"/>
           <p:cNvSpPr/>
           <p:nvPr/>
         </p:nvSpPr>
@@ -11411,7 +11080,7 @@
       </p:sp>
       <p:sp>
         <p:nvSpPr>
-          <p:cNvPr id="31" name="TextBox 30"/>
+          <p:cNvPr id="28" name="TextBox 27"/>
           <p:cNvSpPr txBox="1"/>
           <p:nvPr/>
         </p:nvSpPr>
@@ -11439,14 +11108,14 @@
                 </a:solidFill>
                 <a:latin typeface="Calibri"/>
               </a:rPr>
-              <a:t>Severity Reality Check  ·  NST DVA Capstone 2  ·  April 2026</a:t>
-            </a:r>
-          </a:p>
-        </p:txBody>
-      </p:sp>
-      <p:sp>
-        <p:nvSpPr>
-          <p:cNvPr id="32" name="TextBox 31"/>
+              <a:t>DeliverIQ · Severity Reality Check  ·  NST DVA Capstone 2  ·  Section-A · G12</a:t>
+            </a:r>
+          </a:p>
+        </p:txBody>
+      </p:sp>
+      <p:sp>
+        <p:nvSpPr>
+          <p:cNvPr id="29" name="TextBox 28"/>
           <p:cNvSpPr txBox="1"/>
           <p:nvPr/>
         </p:nvSpPr>
@@ -11939,7 +11608,7 @@
                 </a:solidFill>
                 <a:latin typeface="Calibri"/>
               </a:rPr>
-              <a:t>Discount publicly-reported Severity 4 by ~50%; switch to True-Severe-based pricing input.</a:t>
+              <a:t>Discount publicly-reported Severity 4 by ~50%; switch to True-Severe-based pricing.</a:t>
             </a:r>
           </a:p>
         </p:txBody>
@@ -11974,7 +11643,7 @@
                 </a:solidFill>
                 <a:latin typeface="Calibri"/>
               </a:rPr>
-              <a:t>Mis-priced urban-policy margin recovered; more accurate risk-tier pricing.</a:t>
+              <a:t>Mis-priced urban-policy margin recovered.</a:t>
             </a:r>
           </a:p>
         </p:txBody>
@@ -12123,7 +11792,7 @@
                 </a:solidFill>
                 <a:latin typeface="Calibri"/>
               </a:rPr>
-              <a:t>Prioritize signal installations at top-N junction hotspots (from D3).</a:t>
+              <a:t>Prioritize signal installations at top junction hotspots (D3).</a:t>
             </a:r>
           </a:p>
         </p:txBody>
@@ -12158,7 +11827,7 @@
                 </a:solidFill>
                 <a:latin typeface="Calibri"/>
               </a:rPr>
-              <a:t>≈ 0.4 pts severity reduction per retrofit corridor; measurable per-signal ROI.</a:t>
+              <a:t>~62% severity reduction at signal-equipped sites; per-installation ROI.</a:t>
             </a:r>
           </a:p>
         </p:txBody>
@@ -12307,7 +11976,7 @@
                 </a:solidFill>
                 <a:latin typeface="Calibri"/>
               </a:rPr>
-              <a:t>Re-rank corridors by True-Severe Index; shift dispatch off PA + winter night windows.</a:t>
+              <a:t>Re-rank corridors by True-Severe Index; shift dispatch off PA/WV winter night windows.</a:t>
             </a:r>
           </a:p>
         </p:txBody>
@@ -12342,7 +12011,7 @@
                 </a:solidFill>
                 <a:latin typeface="Calibri"/>
               </a:rPr>
-              <a:t>Lower expected claim frequency and severity per million route-miles.</a:t>
+              <a:t>Lower expected claim frequency / severity per million miles.</a:t>
             </a:r>
           </a:p>
         </p:txBody>
@@ -12456,7 +12125,7 @@
                 </a:solidFill>
                 <a:latin typeface="Calibri"/>
               </a:rPr>
-              <a:t>Infrastructure planner</a:t>
+              <a:t>Federal grants</a:t>
             </a:r>
           </a:p>
         </p:txBody>
@@ -12491,7 +12160,7 @@
                 </a:solidFill>
                 <a:latin typeface="Calibri"/>
               </a:rPr>
-              <a:t>Rebalance away from visibility-only spend; invest in junction redesigns + signal coverage.</a:t>
+              <a:t>Reweight per-state safety allocation using True-Severe counts, not raw volume.</a:t>
             </a:r>
           </a:p>
         </p:txBody>
@@ -12526,7 +12195,7 @@
                 </a:solidFill>
                 <a:latin typeface="Calibri"/>
               </a:rPr>
-              <a:t>2–3× improvement in $/severity-point reduction vs visibility-only.</a:t>
+              <a:t>Capital tracks real severity, not reporting frequency.</a:t>
             </a:r>
           </a:p>
         </p:txBody>
@@ -12640,7 +12309,7 @@
                 </a:solidFill>
                 <a:latin typeface="Calibri"/>
               </a:rPr>
-              <a:t>Federal grants</a:t>
+              <a:t>Ride-share / Fleet</a:t>
             </a:r>
           </a:p>
         </p:txBody>
@@ -12675,7 +12344,7 @@
                 </a:solidFill>
                 <a:latin typeface="Calibri"/>
               </a:rPr>
-              <a:t>Reweight per-state safety allocation using True-Severe counts, not raw volume.</a:t>
+              <a:t>Adjust state-level driver pay &amp; rest-cycle by True-Severe density.</a:t>
             </a:r>
           </a:p>
         </p:txBody>
@@ -12710,7 +12379,7 @@
                 </a:solidFill>
                 <a:latin typeface="Calibri"/>
               </a:rPr>
-              <a:t>Capital tracks real severity outcomes, not reporting frequency.</a:t>
+              <a:t>Driver-safety alignment with actual risk; lower carrier liability.</a:t>
             </a:r>
           </a:p>
         </p:txBody>
@@ -12789,7 +12458,7 @@
                 </a:solidFill>
                 <a:latin typeface="Calibri"/>
               </a:rPr>
-              <a:t>Severity Reality Check  ·  NST DVA Capstone 2  ·  April 2026</a:t>
+              <a:t>DeliverIQ · Severity Reality Check  ·  NST DVA Capstone 2  ·  Section-A · G12</a:t>
             </a:r>
           </a:p>
         </p:txBody>
@@ -13107,7 +12776,7 @@
                 </a:solidFill>
                 <a:latin typeface="Calibri"/>
               </a:rPr>
-              <a:t>of Severity-4 in pricing models is over-weighted; bias-correction unlocks ~$100M risk-adj. premium reallocation per $10B book.</a:t>
+              <a:t>of Severity-4 in pricing models is over-weighted; bias-correction unlocks ~$100M risk-adj premium reallocation per $10B book.</a:t>
             </a:r>
           </a:p>
         </p:txBody>
@@ -13223,7 +12892,7 @@
                 </a:solidFill>
                 <a:latin typeface="Calibri"/>
               </a:rPr>
-              <a:t>−0.4 pts</a:t>
+              <a:t>−62%</a:t>
             </a:r>
           </a:p>
         </p:txBody>
@@ -13258,7 +12927,7 @@
                 </a:solidFill>
                 <a:latin typeface="Calibri"/>
               </a:rPr>
-              <a:t>average severity reduction at junctions retrofitted with traffic signals — quantifiable per-installation ROI.</a:t>
+              <a:t>severity drop at locations with traffic signals vs. without — quantifies per-installation infrastructure ROI.</a:t>
             </a:r>
           </a:p>
         </p:txBody>
@@ -13621,7 +13290,7 @@
                 </a:solidFill>
                 <a:latin typeface="Calibri"/>
               </a:rPr>
-              <a:t>Severity Reality Check  ·  NST DVA Capstone 2  ·  April 2026</a:t>
+              <a:t>DeliverIQ · Severity Reality Check  ·  NST DVA Capstone 2  ·  Section-A · G12</a:t>
             </a:r>
           </a:p>
         </p:txBody>
